--- a/Lectures/06-data-exploration.pptx
+++ b/Lectures/06-data-exploration.pptx
@@ -5,39 +5,35 @@
     <p:sldMasterId id="2147483648" r:id="rId1"/>
   </p:sldMasterIdLst>
   <p:notesMasterIdLst>
-    <p:notesMasterId r:id="rId29"/>
+    <p:notesMasterId r:id="rId22"/>
   </p:notesMasterIdLst>
   <p:sldIdLst>
     <p:sldId id="256" r:id="rId2"/>
     <p:sldId id="308" r:id="rId3"/>
     <p:sldId id="302" r:id="rId4"/>
-    <p:sldId id="319" r:id="rId5"/>
-    <p:sldId id="316" r:id="rId6"/>
-    <p:sldId id="301" r:id="rId7"/>
-    <p:sldId id="306" r:id="rId8"/>
-    <p:sldId id="299" r:id="rId9"/>
-    <p:sldId id="307" r:id="rId10"/>
-    <p:sldId id="310" r:id="rId11"/>
-    <p:sldId id="303" r:id="rId12"/>
-    <p:sldId id="312" r:id="rId13"/>
-    <p:sldId id="295" r:id="rId14"/>
-    <p:sldId id="282" r:id="rId15"/>
-    <p:sldId id="518" r:id="rId16"/>
-    <p:sldId id="261" r:id="rId17"/>
-    <p:sldId id="313" r:id="rId18"/>
-    <p:sldId id="517" r:id="rId19"/>
-    <p:sldId id="300" r:id="rId20"/>
-    <p:sldId id="285" r:id="rId21"/>
-    <p:sldId id="283" r:id="rId22"/>
-    <p:sldId id="298" r:id="rId23"/>
-    <p:sldId id="260" r:id="rId24"/>
-    <p:sldId id="311" r:id="rId25"/>
-    <p:sldId id="318" r:id="rId26"/>
-    <p:sldId id="315" r:id="rId27"/>
-    <p:sldId id="519" r:id="rId28"/>
+    <p:sldId id="520" r:id="rId5"/>
+    <p:sldId id="312" r:id="rId6"/>
+    <p:sldId id="295" r:id="rId7"/>
+    <p:sldId id="282" r:id="rId8"/>
+    <p:sldId id="518" r:id="rId9"/>
+    <p:sldId id="261" r:id="rId10"/>
+    <p:sldId id="313" r:id="rId11"/>
+    <p:sldId id="517" r:id="rId12"/>
+    <p:sldId id="300" r:id="rId13"/>
+    <p:sldId id="285" r:id="rId14"/>
+    <p:sldId id="283" r:id="rId15"/>
+    <p:sldId id="298" r:id="rId16"/>
+    <p:sldId id="260" r:id="rId17"/>
+    <p:sldId id="311" r:id="rId18"/>
+    <p:sldId id="318" r:id="rId19"/>
+    <p:sldId id="315" r:id="rId20"/>
+    <p:sldId id="519" r:id="rId21"/>
   </p:sldIdLst>
   <p:sldSz cx="12192000" cy="6858000"/>
   <p:notesSz cx="6858000" cy="9144000"/>
+  <p:custDataLst>
+    <p:tags r:id="rId23"/>
+  </p:custDataLst>
   <p:defaultTextStyle>
     <a:defPPr marR="0" lvl="0" algn="l" rtl="0">
       <a:lnSpc>
@@ -272,7 +268,7 @@
       <p15:sldGuideLst xmlns:p15="http://schemas.microsoft.com/office/powerpoint/2012/main"/>
     </p:ext>
     <p:ext uri="http://customooxmlschemas.google.com/">
-      <go:slidesCustomData xmlns="" xmlns:mc="http://schemas.openxmlformats.org/markup-compatibility/2006" xmlns:mv="urn:schemas-microsoft-com:mac:vml" xmlns:c="http://schemas.openxmlformats.org/drawingml/2006/chart" xmlns:dgm="http://schemas.openxmlformats.org/drawingml/2006/diagram" xmlns:o="urn:schemas-microsoft-com:office:office" xmlns:v="urn:schemas-microsoft-com:vml" xmlns:pvml="urn:schemas-microsoft-com:office:powerpoint" xmlns:com="http://schemas.openxmlformats.org/drawingml/2006/compatibility" xmlns:p14="http://schemas.microsoft.com/office/powerpoint/2010/main" xmlns:p15="http://schemas.microsoft.com/office/powerpoint/2012/main" xmlns:go="http://customooxmlschemas.google.com/" r:id="rId31" roundtripDataSignature="AMtx7mjFyVUGRZWio+dc9dxzYsimUxNJbg=="/>
+      <go:slidesCustomData xmlns:go="http://customooxmlschemas.google.com/" xmlns:p15="http://schemas.microsoft.com/office/powerpoint/2012/main" xmlns:p14="http://schemas.microsoft.com/office/powerpoint/2010/main" xmlns:com="http://schemas.openxmlformats.org/drawingml/2006/compatibility" xmlns:pvml="urn:schemas-microsoft-com:office:powerpoint" xmlns:v="urn:schemas-microsoft-com:vml" xmlns:o="urn:schemas-microsoft-com:office:office" xmlns:dgm="http://schemas.openxmlformats.org/drawingml/2006/diagram" xmlns:c="http://schemas.openxmlformats.org/drawingml/2006/chart" xmlns:mv="urn:schemas-microsoft-com:mac:vml" xmlns:mc="http://schemas.openxmlformats.org/markup-compatibility/2006" xmlns="" r:id="rId31" roundtripDataSignature="AMtx7mjFyVUGRZWio+dc9dxzYsimUxNJbg=="/>
     </p:ext>
   </p:extLst>
 </p:presentation>
@@ -6651,7 +6647,7 @@
               <a:pPr>
                 <a:defRPr/>
               </a:pPr>
-              <a:t>18</a:t>
+              <a:t>11</a:t>
             </a:fld>
             <a:endParaRPr lang="en-US"/>
           </a:p>
@@ -12233,719 +12229,6 @@
 </file>
 
 <file path=ppt/slides/slide10.xml><?xml version="1.0" encoding="utf-8"?>
-<p:sld xmlns:a="http://schemas.openxmlformats.org/drawingml/2006/main" xmlns:r="http://schemas.openxmlformats.org/officeDocument/2006/relationships" xmlns:p="http://schemas.openxmlformats.org/presentationml/2006/main" show="0">
-  <p:cSld>
-    <p:spTree>
-      <p:nvGrpSpPr>
-        <p:cNvPr id="1" name=""/>
-        <p:cNvGrpSpPr/>
-        <p:nvPr/>
-      </p:nvGrpSpPr>
-      <p:grpSpPr>
-        <a:xfrm>
-          <a:off x="0" y="0"/>
-          <a:ext cx="0" cy="0"/>
-          <a:chOff x="0" y="0"/>
-          <a:chExt cx="0" cy="0"/>
-        </a:xfrm>
-      </p:grpSpPr>
-      <p:sp>
-        <p:nvSpPr>
-          <p:cNvPr id="4" name="Text Placeholder 3">
-            <a:extLst>
-              <a:ext uri="{FF2B5EF4-FFF2-40B4-BE49-F238E27FC236}">
-                <a16:creationId xmlns:a16="http://schemas.microsoft.com/office/drawing/2014/main" id="{5E600BA7-FA45-884F-9820-9E5F2CB7AA48}"/>
-              </a:ext>
-            </a:extLst>
-          </p:cNvPr>
-          <p:cNvSpPr>
-            <a:spLocks noGrp="1"/>
-          </p:cNvSpPr>
-          <p:nvPr>
-            <p:ph type="body" idx="1"/>
-          </p:nvPr>
-        </p:nvSpPr>
-        <p:spPr>
-          <a:xfrm>
-            <a:off x="415650" y="2724664"/>
-            <a:ext cx="11360700" cy="1408672"/>
-          </a:xfrm>
-        </p:spPr>
-        <p:txBody>
-          <a:bodyPr/>
-          <a:lstStyle/>
-          <a:p>
-            <a:pPr marL="76200" indent="0" algn="ctr">
-              <a:buNone/>
-            </a:pPr>
-            <a:r>
-              <a:rPr lang="en-US" sz="4800" dirty="0"/>
-              <a:t>Project Team Meeting / Coordination</a:t>
-            </a:r>
-          </a:p>
-          <a:p>
-            <a:pPr marL="76200" indent="0" algn="ctr">
-              <a:buNone/>
-            </a:pPr>
-            <a:r>
-              <a:rPr lang="en-US" sz="4800" dirty="0"/>
-              <a:t>(10 minutes)</a:t>
-            </a:r>
-          </a:p>
-        </p:txBody>
-      </p:sp>
-    </p:spTree>
-    <p:extLst>
-      <p:ext uri="{BB962C8B-B14F-4D97-AF65-F5344CB8AC3E}">
-        <p14:creationId xmlns:p14="http://schemas.microsoft.com/office/powerpoint/2010/main" val="3471448103"/>
-      </p:ext>
-    </p:extLst>
-  </p:cSld>
-  <p:clrMapOvr>
-    <a:masterClrMapping/>
-  </p:clrMapOvr>
-</p:sld>
-</file>
-
-<file path=ppt/slides/slide11.xml><?xml version="1.0" encoding="utf-8"?>
-<p:sld xmlns:a="http://schemas.openxmlformats.org/drawingml/2006/main" xmlns:r="http://schemas.openxmlformats.org/officeDocument/2006/relationships" xmlns:p="http://schemas.openxmlformats.org/presentationml/2006/main" show="0">
-  <p:cSld>
-    <p:spTree>
-      <p:nvGrpSpPr>
-        <p:cNvPr id="1" name=""/>
-        <p:cNvGrpSpPr/>
-        <p:nvPr/>
-      </p:nvGrpSpPr>
-      <p:grpSpPr>
-        <a:xfrm>
-          <a:off x="0" y="0"/>
-          <a:ext cx="0" cy="0"/>
-          <a:chOff x="0" y="0"/>
-          <a:chExt cx="0" cy="0"/>
-        </a:xfrm>
-      </p:grpSpPr>
-      <p:sp>
-        <p:nvSpPr>
-          <p:cNvPr id="2" name="Title 1">
-            <a:extLst>
-              <a:ext uri="{FF2B5EF4-FFF2-40B4-BE49-F238E27FC236}">
-                <a16:creationId xmlns:a16="http://schemas.microsoft.com/office/drawing/2014/main" id="{C433C44B-9CD1-E54C-BEDE-3018CFE1A62F}"/>
-              </a:ext>
-            </a:extLst>
-          </p:cNvPr>
-          <p:cNvSpPr>
-            <a:spLocks noGrp="1"/>
-          </p:cNvSpPr>
-          <p:nvPr>
-            <p:ph type="title"/>
-          </p:nvPr>
-        </p:nvSpPr>
-        <p:spPr/>
-        <p:txBody>
-          <a:bodyPr/>
-          <a:lstStyle/>
-          <a:p>
-            <a:r>
-              <a:rPr lang="en-US" dirty="0"/>
-              <a:t>What do we want you to use this time for?</a:t>
-            </a:r>
-          </a:p>
-        </p:txBody>
-      </p:sp>
-      <p:sp>
-        <p:nvSpPr>
-          <p:cNvPr id="3" name="Text Placeholder 2">
-            <a:extLst>
-              <a:ext uri="{FF2B5EF4-FFF2-40B4-BE49-F238E27FC236}">
-                <a16:creationId xmlns:a16="http://schemas.microsoft.com/office/drawing/2014/main" id="{306939D4-1B3B-C04C-AFE6-D7C738B5CC7F}"/>
-              </a:ext>
-            </a:extLst>
-          </p:cNvPr>
-          <p:cNvSpPr>
-            <a:spLocks noGrp="1"/>
-          </p:cNvSpPr>
-          <p:nvPr>
-            <p:ph type="body" idx="1"/>
-          </p:nvPr>
-        </p:nvSpPr>
-        <p:spPr/>
-        <p:txBody>
-          <a:bodyPr/>
-          <a:lstStyle/>
-          <a:p>
-            <a:pPr>
-              <a:lnSpc>
-                <a:spcPct val="150000"/>
-              </a:lnSpc>
-            </a:pPr>
-            <a:r>
-              <a:rPr lang="en-US" sz="2800" dirty="0"/>
-              <a:t>Get to know each other</a:t>
-            </a:r>
-          </a:p>
-          <a:p>
-            <a:pPr>
-              <a:lnSpc>
-                <a:spcPct val="150000"/>
-              </a:lnSpc>
-            </a:pPr>
-            <a:r>
-              <a:rPr lang="en-US" sz="2800" dirty="0"/>
-              <a:t>Discuss how you’re going to work together</a:t>
-            </a:r>
-          </a:p>
-          <a:p>
-            <a:pPr>
-              <a:lnSpc>
-                <a:spcPct val="150000"/>
-              </a:lnSpc>
-            </a:pPr>
-            <a:r>
-              <a:rPr lang="en-US" sz="2800" dirty="0"/>
-              <a:t>Schedule times to work on the project proposal over the next week and a half</a:t>
-            </a:r>
-          </a:p>
-        </p:txBody>
-      </p:sp>
-    </p:spTree>
-    <p:extLst>
-      <p:ext uri="{BB962C8B-B14F-4D97-AF65-F5344CB8AC3E}">
-        <p14:creationId xmlns:p14="http://schemas.microsoft.com/office/powerpoint/2010/main" val="3388408751"/>
-      </p:ext>
-    </p:extLst>
-  </p:cSld>
-  <p:clrMapOvr>
-    <a:masterClrMapping/>
-  </p:clrMapOvr>
-</p:sld>
-</file>
-
-<file path=ppt/slides/slide12.xml><?xml version="1.0" encoding="utf-8"?>
-<p:sld xmlns:a="http://schemas.openxmlformats.org/drawingml/2006/main" xmlns:r="http://schemas.openxmlformats.org/officeDocument/2006/relationships" xmlns:p="http://schemas.openxmlformats.org/presentationml/2006/main">
-  <p:cSld>
-    <p:spTree>
-      <p:nvGrpSpPr>
-        <p:cNvPr id="1" name=""/>
-        <p:cNvGrpSpPr/>
-        <p:nvPr/>
-      </p:nvGrpSpPr>
-      <p:grpSpPr>
-        <a:xfrm>
-          <a:off x="0" y="0"/>
-          <a:ext cx="0" cy="0"/>
-          <a:chOff x="0" y="0"/>
-          <a:chExt cx="0" cy="0"/>
-        </a:xfrm>
-      </p:grpSpPr>
-      <p:sp>
-        <p:nvSpPr>
-          <p:cNvPr id="4" name="Text Placeholder 3">
-            <a:extLst>
-              <a:ext uri="{FF2B5EF4-FFF2-40B4-BE49-F238E27FC236}">
-                <a16:creationId xmlns:a16="http://schemas.microsoft.com/office/drawing/2014/main" id="{5E600BA7-FA45-884F-9820-9E5F2CB7AA48}"/>
-              </a:ext>
-            </a:extLst>
-          </p:cNvPr>
-          <p:cNvSpPr>
-            <a:spLocks noGrp="1"/>
-          </p:cNvSpPr>
-          <p:nvPr>
-            <p:ph type="body" idx="1"/>
-          </p:nvPr>
-        </p:nvSpPr>
-        <p:spPr>
-          <a:xfrm>
-            <a:off x="415650" y="2724664"/>
-            <a:ext cx="11360700" cy="1408672"/>
-          </a:xfrm>
-        </p:spPr>
-        <p:txBody>
-          <a:bodyPr/>
-          <a:lstStyle/>
-          <a:p>
-            <a:pPr marL="76200" indent="0" algn="ctr">
-              <a:buNone/>
-            </a:pPr>
-            <a:r>
-              <a:rPr lang="en-US" sz="4800" dirty="0"/>
-              <a:t>Data Exploration Overview</a:t>
-            </a:r>
-          </a:p>
-        </p:txBody>
-      </p:sp>
-    </p:spTree>
-    <p:extLst>
-      <p:ext uri="{BB962C8B-B14F-4D97-AF65-F5344CB8AC3E}">
-        <p14:creationId xmlns:p14="http://schemas.microsoft.com/office/powerpoint/2010/main" val="1330406750"/>
-      </p:ext>
-    </p:extLst>
-  </p:cSld>
-  <p:clrMapOvr>
-    <a:masterClrMapping/>
-  </p:clrMapOvr>
-</p:sld>
-</file>
-
-<file path=ppt/slides/slide13.xml><?xml version="1.0" encoding="utf-8"?>
-<p:sld xmlns:a="http://schemas.openxmlformats.org/drawingml/2006/main" xmlns:r="http://schemas.openxmlformats.org/officeDocument/2006/relationships" xmlns:p="http://schemas.openxmlformats.org/presentationml/2006/main">
-  <p:cSld>
-    <p:spTree>
-      <p:nvGrpSpPr>
-        <p:cNvPr id="1" name=""/>
-        <p:cNvGrpSpPr/>
-        <p:nvPr/>
-      </p:nvGrpSpPr>
-      <p:grpSpPr>
-        <a:xfrm>
-          <a:off x="0" y="0"/>
-          <a:ext cx="0" cy="0"/>
-          <a:chOff x="0" y="0"/>
-          <a:chExt cx="0" cy="0"/>
-        </a:xfrm>
-      </p:grpSpPr>
-      <p:sp>
-        <p:nvSpPr>
-          <p:cNvPr id="2" name="Title 1">
-            <a:extLst>
-              <a:ext uri="{FF2B5EF4-FFF2-40B4-BE49-F238E27FC236}">
-                <a16:creationId xmlns:a16="http://schemas.microsoft.com/office/drawing/2014/main" id="{94CF2A94-A63F-6149-AA28-2E35B60E3D3E}"/>
-              </a:ext>
-            </a:extLst>
-          </p:cNvPr>
-          <p:cNvSpPr>
-            <a:spLocks noGrp="1"/>
-          </p:cNvSpPr>
-          <p:nvPr>
-            <p:ph type="title"/>
-          </p:nvPr>
-        </p:nvSpPr>
-        <p:spPr/>
-        <p:txBody>
-          <a:bodyPr/>
-          <a:lstStyle/>
-          <a:p>
-            <a:endParaRPr lang="en-US"/>
-          </a:p>
-        </p:txBody>
-      </p:sp>
-      <p:graphicFrame>
-        <p:nvGraphicFramePr>
-          <p:cNvPr id="3" name="Diagram 2">
-            <a:extLst>
-              <a:ext uri="{FF2B5EF4-FFF2-40B4-BE49-F238E27FC236}">
-                <a16:creationId xmlns:a16="http://schemas.microsoft.com/office/drawing/2014/main" id="{8E902576-68A9-6E48-B0FE-5B1889953DC8}"/>
-              </a:ext>
-            </a:extLst>
-          </p:cNvPr>
-          <p:cNvGraphicFramePr/>
-          <p:nvPr>
-            <p:extLst>
-              <p:ext uri="{D42A27DB-BD31-4B8C-83A1-F6EECF244321}">
-                <p14:modId xmlns:p14="http://schemas.microsoft.com/office/powerpoint/2010/main" val="1737878827"/>
-              </p:ext>
-            </p:extLst>
-          </p:nvPr>
-        </p:nvGraphicFramePr>
-        <p:xfrm>
-          <a:off x="180467" y="0"/>
-          <a:ext cx="11776400" cy="6858000"/>
-        </p:xfrm>
-        <a:graphic>
-          <a:graphicData uri="http://schemas.openxmlformats.org/drawingml/2006/diagram">
-            <dgm:relIds xmlns:dgm="http://schemas.openxmlformats.org/drawingml/2006/diagram" xmlns:r="http://schemas.openxmlformats.org/officeDocument/2006/relationships" r:dm="rId2" r:lo="rId3" r:qs="rId4" r:cs="rId5"/>
-          </a:graphicData>
-        </a:graphic>
-      </p:graphicFrame>
-      <p:sp>
-        <p:nvSpPr>
-          <p:cNvPr id="4" name="Rectangle 3">
-            <a:extLst>
-              <a:ext uri="{FF2B5EF4-FFF2-40B4-BE49-F238E27FC236}">
-                <a16:creationId xmlns:a16="http://schemas.microsoft.com/office/drawing/2014/main" id="{E2C99BF2-C81A-5246-89D3-E49BCDCAD699}"/>
-              </a:ext>
-            </a:extLst>
-          </p:cNvPr>
-          <p:cNvSpPr/>
-          <p:nvPr/>
-        </p:nvSpPr>
-        <p:spPr>
-          <a:xfrm>
-            <a:off x="6377498" y="274320"/>
-            <a:ext cx="2534195" cy="1789611"/>
-          </a:xfrm>
-          <a:prstGeom prst="rect">
-            <a:avLst/>
-          </a:prstGeom>
-          <a:noFill/>
-          <a:ln w="76200">
-            <a:solidFill>
-              <a:srgbClr val="C00000"/>
-            </a:solidFill>
-          </a:ln>
-        </p:spPr>
-        <p:style>
-          <a:lnRef idx="2">
-            <a:schemeClr val="accent1">
-              <a:shade val="50000"/>
-            </a:schemeClr>
-          </a:lnRef>
-          <a:fillRef idx="1">
-            <a:schemeClr val="accent1"/>
-          </a:fillRef>
-          <a:effectRef idx="0">
-            <a:schemeClr val="accent1"/>
-          </a:effectRef>
-          <a:fontRef idx="minor">
-            <a:schemeClr val="lt1"/>
-          </a:fontRef>
-        </p:style>
-        <p:txBody>
-          <a:bodyPr rtlCol="0" anchor="ctr"/>
-          <a:lstStyle/>
-          <a:p>
-            <a:pPr algn="ctr"/>
-            <a:endParaRPr lang="en-US"/>
-          </a:p>
-        </p:txBody>
-      </p:sp>
-    </p:spTree>
-    <p:extLst>
-      <p:ext uri="{BB962C8B-B14F-4D97-AF65-F5344CB8AC3E}">
-        <p14:creationId xmlns:p14="http://schemas.microsoft.com/office/powerpoint/2010/main" val="2624855364"/>
-      </p:ext>
-    </p:extLst>
-  </p:cSld>
-  <p:clrMapOvr>
-    <a:masterClrMapping/>
-  </p:clrMapOvr>
-</p:sld>
-</file>
-
-<file path=ppt/slides/slide14.xml><?xml version="1.0" encoding="utf-8"?>
-<p:sld xmlns:a="http://schemas.openxmlformats.org/drawingml/2006/main" xmlns:r="http://schemas.openxmlformats.org/officeDocument/2006/relationships" xmlns:p="http://schemas.openxmlformats.org/presentationml/2006/main">
-  <p:cSld>
-    <p:spTree>
-      <p:nvGrpSpPr>
-        <p:cNvPr id="1" name=""/>
-        <p:cNvGrpSpPr/>
-        <p:nvPr/>
-      </p:nvGrpSpPr>
-      <p:grpSpPr>
-        <a:xfrm>
-          <a:off x="0" y="0"/>
-          <a:ext cx="0" cy="0"/>
-          <a:chOff x="0" y="0"/>
-          <a:chExt cx="0" cy="0"/>
-        </a:xfrm>
-      </p:grpSpPr>
-      <p:sp>
-        <p:nvSpPr>
-          <p:cNvPr id="2" name="Title 1">
-            <a:extLst>
-              <a:ext uri="{FF2B5EF4-FFF2-40B4-BE49-F238E27FC236}">
-                <a16:creationId xmlns:a16="http://schemas.microsoft.com/office/drawing/2014/main" id="{21359BA9-BA2B-D148-89DA-A99081B1FF81}"/>
-              </a:ext>
-            </a:extLst>
-          </p:cNvPr>
-          <p:cNvSpPr>
-            <a:spLocks noGrp="1"/>
-          </p:cNvSpPr>
-          <p:nvPr>
-            <p:ph type="title"/>
-          </p:nvPr>
-        </p:nvSpPr>
-        <p:spPr/>
-        <p:txBody>
-          <a:bodyPr/>
-          <a:lstStyle/>
-          <a:p>
-            <a:r>
-              <a:rPr lang="en-US" dirty="0"/>
-              <a:t>Why is data exploration important?</a:t>
-            </a:r>
-          </a:p>
-        </p:txBody>
-      </p:sp>
-    </p:spTree>
-    <p:extLst>
-      <p:ext uri="{BB962C8B-B14F-4D97-AF65-F5344CB8AC3E}">
-        <p14:creationId xmlns:p14="http://schemas.microsoft.com/office/powerpoint/2010/main" val="1721185332"/>
-      </p:ext>
-    </p:extLst>
-  </p:cSld>
-  <p:clrMapOvr>
-    <a:masterClrMapping/>
-  </p:clrMapOvr>
-</p:sld>
-</file>
-
-<file path=ppt/slides/slide15.xml><?xml version="1.0" encoding="utf-8"?>
-<p:sld xmlns:a="http://schemas.openxmlformats.org/drawingml/2006/main" xmlns:r="http://schemas.openxmlformats.org/officeDocument/2006/relationships" xmlns:p="http://schemas.openxmlformats.org/presentationml/2006/main">
-  <p:cSld>
-    <p:spTree>
-      <p:nvGrpSpPr>
-        <p:cNvPr id="1" name=""/>
-        <p:cNvGrpSpPr/>
-        <p:nvPr/>
-      </p:nvGrpSpPr>
-      <p:grpSpPr>
-        <a:xfrm>
-          <a:off x="0" y="0"/>
-          <a:ext cx="0" cy="0"/>
-          <a:chOff x="0" y="0"/>
-          <a:chExt cx="0" cy="0"/>
-        </a:xfrm>
-      </p:grpSpPr>
-      <p:sp>
-        <p:nvSpPr>
-          <p:cNvPr id="2" name="Title 1">
-            <a:extLst>
-              <a:ext uri="{FF2B5EF4-FFF2-40B4-BE49-F238E27FC236}">
-                <a16:creationId xmlns:a16="http://schemas.microsoft.com/office/drawing/2014/main" id="{21359BA9-BA2B-D148-89DA-A99081B1FF81}"/>
-              </a:ext>
-            </a:extLst>
-          </p:cNvPr>
-          <p:cNvSpPr>
-            <a:spLocks noGrp="1"/>
-          </p:cNvSpPr>
-          <p:nvPr>
-            <p:ph type="title"/>
-          </p:nvPr>
-        </p:nvSpPr>
-        <p:spPr/>
-        <p:txBody>
-          <a:bodyPr/>
-          <a:lstStyle/>
-          <a:p>
-            <a:r>
-              <a:rPr lang="en-US" dirty="0"/>
-              <a:t>Why is data exploration important?</a:t>
-            </a:r>
-          </a:p>
-        </p:txBody>
-      </p:sp>
-      <p:sp>
-        <p:nvSpPr>
-          <p:cNvPr id="3" name="Text Placeholder 2">
-            <a:extLst>
-              <a:ext uri="{FF2B5EF4-FFF2-40B4-BE49-F238E27FC236}">
-                <a16:creationId xmlns:a16="http://schemas.microsoft.com/office/drawing/2014/main" id="{DDA03E0F-5F3D-5B4D-8232-BF72B84A198E}"/>
-              </a:ext>
-            </a:extLst>
-          </p:cNvPr>
-          <p:cNvSpPr>
-            <a:spLocks noGrp="1"/>
-          </p:cNvSpPr>
-          <p:nvPr>
-            <p:ph type="body" idx="1"/>
-          </p:nvPr>
-        </p:nvSpPr>
-        <p:spPr>
-          <a:xfrm>
-            <a:off x="415600" y="1536632"/>
-            <a:ext cx="11360700" cy="5000091"/>
-          </a:xfrm>
-        </p:spPr>
-        <p:txBody>
-          <a:bodyPr/>
-          <a:lstStyle/>
-          <a:p>
-            <a:pPr marL="533400" indent="-457200">
-              <a:buFont typeface="+mj-lt"/>
-              <a:buAutoNum type="arabicPeriod"/>
-            </a:pPr>
-            <a:r>
-              <a:rPr lang="en-US" dirty="0"/>
-              <a:t>Sanity Check the data you were given</a:t>
-            </a:r>
-            <a:br>
-              <a:rPr lang="en-US" dirty="0"/>
-            </a:br>
-            <a:endParaRPr lang="en-US" dirty="0"/>
-          </a:p>
-          <a:p>
-            <a:pPr marL="533400" indent="-457200">
-              <a:buFont typeface="+mj-lt"/>
-              <a:buAutoNum type="arabicPeriod"/>
-            </a:pPr>
-            <a:r>
-              <a:rPr lang="en-US" dirty="0"/>
-              <a:t>Understanding the problem and domain </a:t>
-            </a:r>
-            <a:br>
-              <a:rPr lang="en-US" dirty="0"/>
-            </a:br>
-            <a:endParaRPr lang="en-US" dirty="0"/>
-          </a:p>
-          <a:p>
-            <a:pPr marL="533400" indent="-457200">
-              <a:buFont typeface="+mj-lt"/>
-              <a:buAutoNum type="arabicPeriod"/>
-            </a:pPr>
-            <a:r>
-              <a:rPr lang="en-US" dirty="0"/>
-              <a:t>Problem Formulation </a:t>
-            </a:r>
-            <a:br>
-              <a:rPr lang="en-US" dirty="0"/>
-            </a:br>
-            <a:endParaRPr lang="en-US" dirty="0"/>
-          </a:p>
-          <a:p>
-            <a:pPr marL="533400" indent="-457200">
-              <a:buFont typeface="+mj-lt"/>
-              <a:buAutoNum type="arabicPeriod"/>
-            </a:pPr>
-            <a:r>
-              <a:rPr lang="en-US" dirty="0"/>
-              <a:t>Debugging </a:t>
-            </a:r>
-            <a:br>
-              <a:rPr lang="en-US" dirty="0"/>
-            </a:br>
-            <a:endParaRPr lang="en-US" dirty="0"/>
-          </a:p>
-          <a:p>
-            <a:pPr marL="533400" indent="-457200">
-              <a:buFont typeface="+mj-lt"/>
-              <a:buAutoNum type="arabicPeriod"/>
-            </a:pPr>
-            <a:r>
-              <a:rPr lang="en-US" dirty="0"/>
-              <a:t>Feature Generation/Selection </a:t>
-            </a:r>
-            <a:br>
-              <a:rPr lang="en-US" dirty="0"/>
-            </a:br>
-            <a:endParaRPr lang="en-US" dirty="0"/>
-          </a:p>
-          <a:p>
-            <a:pPr marL="533400" indent="-457200">
-              <a:buFont typeface="+mj-lt"/>
-              <a:buAutoNum type="arabicPeriod"/>
-            </a:pPr>
-            <a:r>
-              <a:rPr lang="en-US" dirty="0"/>
-              <a:t>Interpretation of results </a:t>
-            </a:r>
-          </a:p>
-          <a:p>
-            <a:pPr marL="76200" indent="0">
-              <a:buNone/>
-            </a:pPr>
-            <a:endParaRPr lang="en-US" dirty="0"/>
-          </a:p>
-        </p:txBody>
-      </p:sp>
-    </p:spTree>
-    <p:extLst>
-      <p:ext uri="{BB962C8B-B14F-4D97-AF65-F5344CB8AC3E}">
-        <p14:creationId xmlns:p14="http://schemas.microsoft.com/office/powerpoint/2010/main" val="2094209390"/>
-      </p:ext>
-    </p:extLst>
-  </p:cSld>
-  <p:clrMapOvr>
-    <a:masterClrMapping/>
-  </p:clrMapOvr>
-</p:sld>
-</file>
-
-<file path=ppt/slides/slide16.xml><?xml version="1.0" encoding="utf-8"?>
-<p:sld xmlns:a="http://schemas.openxmlformats.org/drawingml/2006/main" xmlns:r="http://schemas.openxmlformats.org/officeDocument/2006/relationships" xmlns:p="http://schemas.openxmlformats.org/presentationml/2006/main">
-  <p:cSld>
-    <p:spTree>
-      <p:nvGrpSpPr>
-        <p:cNvPr id="1" name=""/>
-        <p:cNvGrpSpPr/>
-        <p:nvPr/>
-      </p:nvGrpSpPr>
-      <p:grpSpPr>
-        <a:xfrm>
-          <a:off x="0" y="0"/>
-          <a:ext cx="0" cy="0"/>
-          <a:chOff x="0" y="0"/>
-          <a:chExt cx="0" cy="0"/>
-        </a:xfrm>
-      </p:grpSpPr>
-      <p:sp>
-        <p:nvSpPr>
-          <p:cNvPr id="8194" name="Rectangle 2"/>
-          <p:cNvSpPr>
-            <a:spLocks noGrp="1" noChangeArrowheads="1"/>
-          </p:cNvSpPr>
-          <p:nvPr>
-            <p:ph type="title"/>
-          </p:nvPr>
-        </p:nvSpPr>
-        <p:spPr/>
-        <p:txBody>
-          <a:bodyPr/>
-          <a:lstStyle/>
-          <a:p>
-            <a:r>
-              <a:rPr lang="en-US" altLang="en-US" dirty="0"/>
-              <a:t> Simple task for data exploration</a:t>
-            </a:r>
-          </a:p>
-        </p:txBody>
-      </p:sp>
-      <p:sp>
-        <p:nvSpPr>
-          <p:cNvPr id="8195" name="Rectangle 3"/>
-          <p:cNvSpPr>
-            <a:spLocks noGrp="1" noChangeArrowheads="1"/>
-          </p:cNvSpPr>
-          <p:nvPr>
-            <p:ph type="body" idx="1"/>
-          </p:nvPr>
-        </p:nvSpPr>
-        <p:spPr/>
-        <p:txBody>
-          <a:bodyPr/>
-          <a:lstStyle/>
-          <a:p>
-            <a:r>
-              <a:rPr lang="en-US" dirty="0"/>
-              <a:t>Write a SQL query that takes a “person id” (e.g., student, voter, facility, entity, </a:t>
-            </a:r>
-            <a:r>
-              <a:rPr lang="en-US" dirty="0" err="1"/>
-              <a:t>etc</a:t>
-            </a:r>
-            <a:r>
-              <a:rPr lang="en-US" dirty="0"/>
-              <a:t>) and gives you everything you know about that person. </a:t>
-            </a:r>
-            <a:br>
-              <a:rPr lang="en-US" dirty="0"/>
-            </a:br>
-            <a:endParaRPr lang="en-US" dirty="0"/>
-          </a:p>
-          <a:p>
-            <a:r>
-              <a:rPr lang="en-US" dirty="0"/>
-              <a:t>Add a date parameter to it to give you everything about that entity up to that date </a:t>
-            </a:r>
-            <a:endParaRPr lang="en-US" dirty="0">
-              <a:effectLst/>
-            </a:endParaRPr>
-          </a:p>
-        </p:txBody>
-      </p:sp>
-    </p:spTree>
-    <p:extLst>
-      <p:ext uri="{BB962C8B-B14F-4D97-AF65-F5344CB8AC3E}">
-        <p14:creationId xmlns:p14="http://schemas.microsoft.com/office/powerpoint/2010/main" val="2446059493"/>
-      </p:ext>
-    </p:extLst>
-  </p:cSld>
-  <p:clrMapOvr>
-    <a:masterClrMapping/>
-  </p:clrMapOvr>
-</p:sld>
-</file>
-
-<file path=ppt/slides/slide17.xml><?xml version="1.0" encoding="utf-8"?>
 <p:sld xmlns:a="http://schemas.openxmlformats.org/drawingml/2006/main" xmlns:r="http://schemas.openxmlformats.org/officeDocument/2006/relationships" xmlns:p="http://schemas.openxmlformats.org/presentationml/2006/main">
   <p:cSld>
     <p:spTree>
@@ -13029,7 +12312,7 @@
 </p:sld>
 </file>
 
-<file path=ppt/slides/slide18.xml><?xml version="1.0" encoding="utf-8"?>
+<file path=ppt/slides/slide11.xml><?xml version="1.0" encoding="utf-8"?>
 <p:sld xmlns:a="http://schemas.openxmlformats.org/drawingml/2006/main" xmlns:r="http://schemas.openxmlformats.org/officeDocument/2006/relationships" xmlns:p="http://schemas.openxmlformats.org/presentationml/2006/main">
   <p:cSld>
     <p:spTree>
@@ -13640,7 +12923,7 @@
 </p:sld>
 </file>
 
-<file path=ppt/slides/slide19.xml><?xml version="1.0" encoding="utf-8"?>
+<file path=ppt/slides/slide12.xml><?xml version="1.0" encoding="utf-8"?>
 <p:sld xmlns:a="http://schemas.openxmlformats.org/drawingml/2006/main" xmlns:r="http://schemas.openxmlformats.org/officeDocument/2006/relationships" xmlns:p="http://schemas.openxmlformats.org/presentationml/2006/main">
   <p:cSld>
     <p:spTree>
@@ -13786,82 +13069,7 @@
 </p:sld>
 </file>
 
-<file path=ppt/slides/slide2.xml><?xml version="1.0" encoding="utf-8"?>
-<p:sld xmlns:a="http://schemas.openxmlformats.org/drawingml/2006/main" xmlns:r="http://schemas.openxmlformats.org/officeDocument/2006/relationships" xmlns:p="http://schemas.openxmlformats.org/presentationml/2006/main">
-  <p:cSld>
-    <p:spTree>
-      <p:nvGrpSpPr>
-        <p:cNvPr id="1" name=""/>
-        <p:cNvGrpSpPr/>
-        <p:nvPr/>
-      </p:nvGrpSpPr>
-      <p:grpSpPr>
-        <a:xfrm>
-          <a:off x="0" y="0"/>
-          <a:ext cx="0" cy="0"/>
-          <a:chOff x="0" y="0"/>
-          <a:chExt cx="0" cy="0"/>
-        </a:xfrm>
-      </p:grpSpPr>
-      <p:sp>
-        <p:nvSpPr>
-          <p:cNvPr id="4" name="Text Placeholder 3">
-            <a:extLst>
-              <a:ext uri="{FF2B5EF4-FFF2-40B4-BE49-F238E27FC236}">
-                <a16:creationId xmlns:a16="http://schemas.microsoft.com/office/drawing/2014/main" id="{5E600BA7-FA45-884F-9820-9E5F2CB7AA48}"/>
-              </a:ext>
-            </a:extLst>
-          </p:cNvPr>
-          <p:cNvSpPr>
-            <a:spLocks noGrp="1"/>
-          </p:cNvSpPr>
-          <p:nvPr>
-            <p:ph type="body" idx="1"/>
-          </p:nvPr>
-        </p:nvSpPr>
-        <p:spPr>
-          <a:xfrm>
-            <a:off x="415650" y="2724664"/>
-            <a:ext cx="11360700" cy="1408672"/>
-          </a:xfrm>
-        </p:spPr>
-        <p:txBody>
-          <a:bodyPr/>
-          <a:lstStyle/>
-          <a:p>
-            <a:pPr marL="76200" indent="0" algn="ctr">
-              <a:buNone/>
-            </a:pPr>
-            <a:r>
-              <a:rPr lang="en-US" sz="4800" dirty="0"/>
-              <a:t>Please Sit with </a:t>
-            </a:r>
-          </a:p>
-          <a:p>
-            <a:pPr marL="76200" indent="0" algn="ctr">
-              <a:buNone/>
-            </a:pPr>
-            <a:r>
-              <a:rPr lang="en-US" sz="4800" dirty="0"/>
-              <a:t>Your Project Teams</a:t>
-            </a:r>
-          </a:p>
-        </p:txBody>
-      </p:sp>
-    </p:spTree>
-    <p:extLst>
-      <p:ext uri="{BB962C8B-B14F-4D97-AF65-F5344CB8AC3E}">
-        <p14:creationId xmlns:p14="http://schemas.microsoft.com/office/powerpoint/2010/main" val="134665013"/>
-      </p:ext>
-    </p:extLst>
-  </p:cSld>
-  <p:clrMapOvr>
-    <a:masterClrMapping/>
-  </p:clrMapOvr>
-</p:sld>
-</file>
-
-<file path=ppt/slides/slide20.xml><?xml version="1.0" encoding="utf-8"?>
+<file path=ppt/slides/slide13.xml><?xml version="1.0" encoding="utf-8"?>
 <p:sld xmlns:a="http://schemas.openxmlformats.org/drawingml/2006/main" xmlns:r="http://schemas.openxmlformats.org/officeDocument/2006/relationships" xmlns:p="http://schemas.openxmlformats.org/presentationml/2006/main">
   <p:cSld>
     <p:spTree>
@@ -13983,7 +13191,7 @@
 </p:sld>
 </file>
 
-<file path=ppt/slides/slide21.xml><?xml version="1.0" encoding="utf-8"?>
+<file path=ppt/slides/slide14.xml><?xml version="1.0" encoding="utf-8"?>
 <p:sld xmlns:a="http://schemas.openxmlformats.org/drawingml/2006/main" xmlns:r="http://schemas.openxmlformats.org/officeDocument/2006/relationships" xmlns:p="http://schemas.openxmlformats.org/presentationml/2006/main">
   <p:cSld>
     <p:spTree>
@@ -14043,7 +13251,7 @@
 </p:sld>
 </file>
 
-<file path=ppt/slides/slide22.xml><?xml version="1.0" encoding="utf-8"?>
+<file path=ppt/slides/slide15.xml><?xml version="1.0" encoding="utf-8"?>
 <p:sld xmlns:a="http://schemas.openxmlformats.org/drawingml/2006/main" xmlns:r="http://schemas.openxmlformats.org/officeDocument/2006/relationships" xmlns:p="http://schemas.openxmlformats.org/presentationml/2006/main">
   <p:cSld>
     <p:spTree>
@@ -14120,7 +13328,7 @@
 </p:sld>
 </file>
 
-<file path=ppt/slides/slide23.xml><?xml version="1.0" encoding="utf-8"?>
+<file path=ppt/slides/slide16.xml><?xml version="1.0" encoding="utf-8"?>
 <p:sld xmlns:a="http://schemas.openxmlformats.org/drawingml/2006/main" xmlns:r="http://schemas.openxmlformats.org/officeDocument/2006/relationships" xmlns:p="http://schemas.openxmlformats.org/presentationml/2006/main">
   <p:cSld>
     <p:spTree>
@@ -14235,7 +13443,7 @@
 </p:sld>
 </file>
 
-<file path=ppt/slides/slide24.xml><?xml version="1.0" encoding="utf-8"?>
+<file path=ppt/slides/slide17.xml><?xml version="1.0" encoding="utf-8"?>
 <p:sld xmlns:a="http://schemas.openxmlformats.org/drawingml/2006/main" xmlns:r="http://schemas.openxmlformats.org/officeDocument/2006/relationships" xmlns:p="http://schemas.openxmlformats.org/presentationml/2006/main">
   <p:cSld>
     <p:spTree>
@@ -14310,7 +13518,7 @@
 </p:sld>
 </file>
 
-<file path=ppt/slides/slide25.xml><?xml version="1.0" encoding="utf-8"?>
+<file path=ppt/slides/slide18.xml><?xml version="1.0" encoding="utf-8"?>
 <p:sld xmlns:a="http://schemas.openxmlformats.org/drawingml/2006/main" xmlns:r="http://schemas.openxmlformats.org/officeDocument/2006/relationships" xmlns:p="http://schemas.openxmlformats.org/presentationml/2006/main">
   <p:cSld>
     <p:spTree>
@@ -14434,7 +13642,7 @@
 </p:sld>
 </file>
 
-<file path=ppt/slides/slide26.xml><?xml version="1.0" encoding="utf-8"?>
+<file path=ppt/slides/slide19.xml><?xml version="1.0" encoding="utf-8"?>
 <p:sld xmlns:a="http://schemas.openxmlformats.org/drawingml/2006/main" xmlns:r="http://schemas.openxmlformats.org/officeDocument/2006/relationships" xmlns:p="http://schemas.openxmlformats.org/presentationml/2006/main">
   <p:cSld>
     <p:spTree>
@@ -14580,7 +13788,82 @@
 </p:sld>
 </file>
 
-<file path=ppt/slides/slide27.xml><?xml version="1.0" encoding="utf-8"?>
+<file path=ppt/slides/slide2.xml><?xml version="1.0" encoding="utf-8"?>
+<p:sld xmlns:a="http://schemas.openxmlformats.org/drawingml/2006/main" xmlns:r="http://schemas.openxmlformats.org/officeDocument/2006/relationships" xmlns:p="http://schemas.openxmlformats.org/presentationml/2006/main">
+  <p:cSld>
+    <p:spTree>
+      <p:nvGrpSpPr>
+        <p:cNvPr id="1" name=""/>
+        <p:cNvGrpSpPr/>
+        <p:nvPr/>
+      </p:nvGrpSpPr>
+      <p:grpSpPr>
+        <a:xfrm>
+          <a:off x="0" y="0"/>
+          <a:ext cx="0" cy="0"/>
+          <a:chOff x="0" y="0"/>
+          <a:chExt cx="0" cy="0"/>
+        </a:xfrm>
+      </p:grpSpPr>
+      <p:sp>
+        <p:nvSpPr>
+          <p:cNvPr id="4" name="Text Placeholder 3">
+            <a:extLst>
+              <a:ext uri="{FF2B5EF4-FFF2-40B4-BE49-F238E27FC236}">
+                <a16:creationId xmlns:a16="http://schemas.microsoft.com/office/drawing/2014/main" id="{5E600BA7-FA45-884F-9820-9E5F2CB7AA48}"/>
+              </a:ext>
+            </a:extLst>
+          </p:cNvPr>
+          <p:cNvSpPr>
+            <a:spLocks noGrp="1"/>
+          </p:cNvSpPr>
+          <p:nvPr>
+            <p:ph type="body" idx="1"/>
+          </p:nvPr>
+        </p:nvSpPr>
+        <p:spPr>
+          <a:xfrm>
+            <a:off x="415650" y="2724664"/>
+            <a:ext cx="11360700" cy="1408672"/>
+          </a:xfrm>
+        </p:spPr>
+        <p:txBody>
+          <a:bodyPr/>
+          <a:lstStyle/>
+          <a:p>
+            <a:pPr marL="76200" indent="0" algn="ctr">
+              <a:buNone/>
+            </a:pPr>
+            <a:r>
+              <a:rPr lang="en-US" sz="4800" dirty="0"/>
+              <a:t>Please Sit with </a:t>
+            </a:r>
+          </a:p>
+          <a:p>
+            <a:pPr marL="76200" indent="0" algn="ctr">
+              <a:buNone/>
+            </a:pPr>
+            <a:r>
+              <a:rPr lang="en-US" sz="4800" dirty="0"/>
+              <a:t>Your Project Teams</a:t>
+            </a:r>
+          </a:p>
+        </p:txBody>
+      </p:sp>
+    </p:spTree>
+    <p:extLst>
+      <p:ext uri="{BB962C8B-B14F-4D97-AF65-F5344CB8AC3E}">
+        <p14:creationId xmlns:p14="http://schemas.microsoft.com/office/powerpoint/2010/main" val="134665013"/>
+      </p:ext>
+    </p:extLst>
+  </p:cSld>
+  <p:clrMapOvr>
+    <a:masterClrMapping/>
+  </p:clrMapOvr>
+</p:sld>
+</file>
+
+<file path=ppt/slides/slide20.xml><?xml version="1.0" encoding="utf-8"?>
 <p:sld xmlns:a="http://schemas.openxmlformats.org/drawingml/2006/main" xmlns:r="http://schemas.openxmlformats.org/officeDocument/2006/relationships" xmlns:p="http://schemas.openxmlformats.org/presentationml/2006/main">
   <p:cSld>
     <p:spTree>
@@ -14678,24 +13961,14 @@
             </a:r>
           </a:p>
           <a:p>
-            <a:pPr lvl="1">
-              <a:spcBef>
-                <a:spcPts val="1000"/>
-              </a:spcBef>
-            </a:pPr>
-            <a:r>
-              <a:rPr lang="en-US" sz="2000" dirty="0"/>
-              <a:t>See canvas for pre-session assignment</a:t>
-            </a:r>
-          </a:p>
-          <a:p>
-            <a:pPr>
+            <a:pPr marL="76200" indent="0">
               <a:lnSpc>
                 <a:spcPct val="100000"/>
               </a:lnSpc>
               <a:spcBef>
                 <a:spcPts val="500"/>
               </a:spcBef>
+              <a:buNone/>
             </a:pPr>
             <a:endParaRPr lang="en-US" dirty="0"/>
           </a:p>
@@ -14859,18 +14132,14 @@
             </a:r>
           </a:p>
           <a:p>
-            <a:pPr lvl="1">
-              <a:spcBef>
-                <a:spcPts val="1000"/>
+            <a:pPr>
+              <a:lnSpc>
+                <a:spcPct val="100000"/>
+              </a:lnSpc>
+              <a:spcBef>
+                <a:spcPts val="500"/>
               </a:spcBef>
             </a:pPr>
-            <a:r>
-              <a:rPr lang="en-US" sz="2000" dirty="0"/>
-              <a:t>See canvas for pre-session assignment</a:t>
-            </a:r>
-            <a:br>
-              <a:rPr lang="en-US" dirty="0"/>
-            </a:br>
             <a:endParaRPr lang="en-US" dirty="0"/>
           </a:p>
           <a:p>
@@ -14949,8 +14218,16 @@
 </file>
 
 <file path=ppt/slides/slide4.xml><?xml version="1.0" encoding="utf-8"?>
-<p:sld xmlns:a="http://schemas.openxmlformats.org/drawingml/2006/main" xmlns:r="http://schemas.openxmlformats.org/officeDocument/2006/relationships" xmlns:p="http://schemas.openxmlformats.org/presentationml/2006/main">
+<p:sld xmlns:a="http://schemas.openxmlformats.org/drawingml/2006/main" xmlns:r="http://schemas.openxmlformats.org/officeDocument/2006/relationships" xmlns:p="http://schemas.openxmlformats.org/presentationml/2006/main" showMasterSp="0">
   <p:cSld>
+    <p:bg>
+      <p:bgPr>
+        <a:solidFill>
+          <a:srgbClr val="FFFFFF"/>
+        </a:solidFill>
+        <a:effectLst/>
+      </p:bgPr>
+    </p:bg>
     <p:spTree>
       <p:nvGrpSpPr>
         <p:cNvPr id="1" name=""/>
@@ -14967,206 +14244,507 @@
       </p:grpSpPr>
       <p:sp>
         <p:nvSpPr>
-          <p:cNvPr id="4" name="Text Placeholder 3">
+          <p:cNvPr id="2" name="Rectangle 1">
             <a:extLst>
               <a:ext uri="{FF2B5EF4-FFF2-40B4-BE49-F238E27FC236}">
-                <a16:creationId xmlns:a16="http://schemas.microsoft.com/office/drawing/2014/main" id="{5E600BA7-FA45-884F-9820-9E5F2CB7AA48}"/>
+                <a16:creationId xmlns:a16="http://schemas.microsoft.com/office/drawing/2014/main" id="{1F46694F-F076-D36D-CDFA-0A40FA5CC401}"/>
               </a:ext>
             </a:extLst>
           </p:cNvPr>
-          <p:cNvSpPr>
-            <a:spLocks noGrp="1"/>
-          </p:cNvSpPr>
+          <p:cNvSpPr/>
           <p:nvPr>
-            <p:ph type="body" idx="1"/>
+            <p:custDataLst>
+              <p:tags r:id="rId2"/>
+            </p:custDataLst>
           </p:nvPr>
         </p:nvSpPr>
         <p:spPr>
           <a:xfrm>
-            <a:off x="415650" y="1686696"/>
-            <a:ext cx="11360700" cy="1408672"/>
+            <a:off x="444693" y="1742703"/>
+            <a:ext cx="2371696" cy="2371696"/>
           </a:xfrm>
+          <a:prstGeom prst="rect">
+            <a:avLst/>
+          </a:prstGeom>
+          <a:blipFill>
+            <a:blip r:embed="rId5">
+              <a:extLst>
+                <a:ext uri="{96DAC541-7B7A-43D3-8B79-37D633B846F1}">
+                  <asvg:svgBlip xmlns:asvg="http://schemas.microsoft.com/office/drawing/2016/SVG/main" r:embed="rId6"/>
+                </a:ext>
+              </a:extLst>
+            </a:blip>
+            <a:stretch>
+              <a:fillRect/>
+            </a:stretch>
+          </a:blipFill>
+          <a:ln>
+            <a:solidFill>
+              <a:srgbClr val="FFFFFF"/>
+            </a:solidFill>
+          </a:ln>
         </p:spPr>
+        <p:style>
+          <a:lnRef idx="2">
+            <a:schemeClr val="accent1">
+              <a:shade val="15000"/>
+            </a:schemeClr>
+          </a:lnRef>
+          <a:fillRef idx="1">
+            <a:schemeClr val="accent1"/>
+          </a:fillRef>
+          <a:effectRef idx="0">
+            <a:schemeClr val="accent1"/>
+          </a:effectRef>
+          <a:fontRef idx="minor">
+            <a:schemeClr val="lt1"/>
+          </a:fontRef>
+        </p:style>
         <p:txBody>
-          <a:bodyPr/>
+          <a:bodyPr rtlCol="0" anchor="ctr"/>
           <a:lstStyle/>
           <a:p>
-            <a:pPr marL="76200" indent="0" algn="ctr">
-              <a:buNone/>
-            </a:pPr>
+            <a:pPr algn="ctr"/>
+            <a:endParaRPr lang="en-US"/>
+          </a:p>
+        </p:txBody>
+      </p:sp>
+      <p:sp>
+        <p:nvSpPr>
+          <p:cNvPr id="3" name="Rectangle 2">
+            <a:extLst>
+              <a:ext uri="{FF2B5EF4-FFF2-40B4-BE49-F238E27FC236}">
+                <a16:creationId xmlns:a16="http://schemas.microsoft.com/office/drawing/2014/main" id="{ED8EF2B0-929F-7137-BB25-C07B098A42A3}"/>
+              </a:ext>
+            </a:extLst>
+          </p:cNvPr>
+          <p:cNvSpPr/>
+          <p:nvPr>
+            <p:custDataLst>
+              <p:tags r:id="rId3"/>
+            </p:custDataLst>
+          </p:nvPr>
+        </p:nvSpPr>
+        <p:spPr>
+          <a:xfrm>
+            <a:off x="3112851" y="1000897"/>
+            <a:ext cx="8486226" cy="3855308"/>
+          </a:xfrm>
+          <a:prstGeom prst="rect">
+            <a:avLst/>
+          </a:prstGeom>
+          <a:noFill/>
+          <a:ln w="25400" cap="flat" cmpd="sng" algn="ctr">
+            <a:solidFill>
+              <a:srgbClr val="FFFFFF"/>
+            </a:solidFill>
+            <a:prstDash val="solid"/>
+          </a:ln>
+          <a:effectLst/>
+          <a:extLst>
+            <a:ext uri="{909E8E84-426E-40DD-AFC4-6F175D3DCCD1}">
+              <a14:hiddenFill xmlns:a14="http://schemas.microsoft.com/office/drawing/2010/main">
+                <a:solidFill>
+                  <a:schemeClr val="accent1"/>
+                </a:solidFill>
+              </a14:hiddenFill>
+            </a:ext>
+          </a:extLst>
+        </p:spPr>
+        <p:style>
+          <a:lnRef idx="2">
+            <a:schemeClr val="accent1">
+              <a:shade val="15000"/>
+            </a:schemeClr>
+          </a:lnRef>
+          <a:fillRef idx="1">
+            <a:schemeClr val="accent1"/>
+          </a:fillRef>
+          <a:effectRef idx="0">
+            <a:schemeClr val="accent1"/>
+          </a:effectRef>
+          <a:fontRef idx="minor">
+            <a:schemeClr val="lt1"/>
+          </a:fontRef>
+        </p:style>
+        <p:txBody>
+          <a:bodyPr rtlCol="0" anchor="ctr"/>
+          <a:lstStyle/>
+          <a:p>
             <a:r>
-              <a:rPr lang="en-US" sz="4800" dirty="0"/>
-              <a:t>Quick Poll:</a:t>
-            </a:r>
-          </a:p>
-          <a:p>
-            <a:pPr marL="76200" indent="0" algn="ctr">
-              <a:buNone/>
-            </a:pPr>
-            <a:r>
-              <a:rPr lang="en-US" sz="4800" dirty="0"/>
-              <a:t>Have you already accessed and started looking at  your project data?</a:t>
-            </a:r>
-          </a:p>
-          <a:p>
-            <a:pPr marL="76200" indent="0" algn="ctr">
-              <a:buNone/>
-            </a:pPr>
-            <a:endParaRPr lang="en-US" sz="4800" dirty="0"/>
-          </a:p>
-          <a:p>
-            <a:pPr marL="76200" indent="0" algn="ctr">
-              <a:buNone/>
-            </a:pPr>
-            <a:r>
-              <a:rPr lang="en-US" sz="4800" dirty="0" err="1"/>
-              <a:t>slido.com</a:t>
-            </a:r>
-            <a:r>
-              <a:rPr lang="en-US" sz="4800" dirty="0"/>
-              <a:t>    #94889</a:t>
+              <a:rPr lang="en-US" sz="4000" b="1">
+                <a:solidFill>
+                  <a:srgbClr val="000000"/>
+                </a:solidFill>
+              </a:rPr>
+              <a:t>Have you already started exploring  your project data?
+</a:t>
             </a:r>
           </a:p>
         </p:txBody>
       </p:sp>
+      <p:sp>
+        <p:nvSpPr>
+          <p:cNvPr id="4" name="Rectangle 3">
+            <a:extLst>
+              <a:ext uri="{FF2B5EF4-FFF2-40B4-BE49-F238E27FC236}">
+                <a16:creationId xmlns:a16="http://schemas.microsoft.com/office/drawing/2014/main" id="{2CAF230D-3751-D193-8268-EFE95CC03354}"/>
+              </a:ext>
+            </a:extLst>
+          </p:cNvPr>
+          <p:cNvSpPr/>
+          <p:nvPr/>
+        </p:nvSpPr>
+        <p:spPr>
+          <a:xfrm>
+            <a:off x="0" y="5820032"/>
+            <a:ext cx="12192001" cy="1037968"/>
+          </a:xfrm>
+          <a:prstGeom prst="rect">
+            <a:avLst/>
+          </a:prstGeom>
+          <a:solidFill>
+            <a:srgbClr val="198038"/>
+          </a:solidFill>
+          <a:ln w="25400" cap="flat" cmpd="sng" algn="ctr">
+            <a:noFill/>
+            <a:prstDash val="solid"/>
+          </a:ln>
+          <a:effectLst/>
+          <a:extLst>
+            <a:ext uri="{91240B29-F687-4F45-9708-019B960494DF}">
+              <a14:hiddenLine xmlns:a14="http://schemas.microsoft.com/office/drawing/2010/main" w="25400" cap="flat" cmpd="sng" algn="ctr">
+                <a:solidFill>
+                  <a:schemeClr val="accent1">
+                    <a:shade val="15000"/>
+                  </a:schemeClr>
+                </a:solidFill>
+                <a:prstDash val="solid"/>
+              </a14:hiddenLine>
+            </a:ext>
+          </a:extLst>
+        </p:spPr>
+        <p:style>
+          <a:lnRef idx="2">
+            <a:schemeClr val="accent1">
+              <a:shade val="15000"/>
+            </a:schemeClr>
+          </a:lnRef>
+          <a:fillRef idx="1">
+            <a:schemeClr val="accent1"/>
+          </a:fillRef>
+          <a:effectRef idx="0">
+            <a:schemeClr val="accent1"/>
+          </a:effectRef>
+          <a:fontRef idx="minor">
+            <a:schemeClr val="lt1"/>
+          </a:fontRef>
+        </p:style>
+        <p:txBody>
+          <a:bodyPr lIns="741155" tIns="259492" rIns="1852888" bIns="203886" rtlCol="0" anchor="ctr">
+            <a:normAutofit fontScale="85000" lnSpcReduction="10000"/>
+          </a:bodyPr>
+          <a:lstStyle/>
+          <a:p>
+            <a:r>
+              <a:rPr lang="en-US" sz="2600">
+                <a:solidFill>
+                  <a:srgbClr val="FFFFFF"/>
+                </a:solidFill>
+              </a:rPr>
+              <a:t>The </a:t>
+            </a:r>
+            <a:r>
+              <a:rPr lang="en-US" sz="2600">
+                <a:solidFill>
+                  <a:srgbClr val="FFFFFF"/>
+                </a:solidFill>
+                <a:hlinkClick r:id="rId7">
+                  <a:extLst>
+                    <a:ext uri="{A12FA001-AC4F-418D-AE19-62706E023703}">
+                      <ahyp:hlinkClr xmlns:ahyp="http://schemas.microsoft.com/office/drawing/2018/hyperlinkcolor" val="tx"/>
+                    </a:ext>
+                  </a:extLst>
+                </a:hlinkClick>
+              </a:rPr>
+              <a:t>Slido app</a:t>
+            </a:r>
+            <a:r>
+              <a:rPr lang="en-US" sz="2600">
+                <a:solidFill>
+                  <a:srgbClr val="FFFFFF"/>
+                </a:solidFill>
+              </a:rPr>
+              <a:t> must be installed on every computer you’re presenting from</a:t>
+            </a:r>
+          </a:p>
+        </p:txBody>
+      </p:sp>
+      <p:pic>
+        <p:nvPicPr>
+          <p:cNvPr id="6" name="Graphic 5">
+            <a:extLst>
+              <a:ext uri="{FF2B5EF4-FFF2-40B4-BE49-F238E27FC236}">
+                <a16:creationId xmlns:a16="http://schemas.microsoft.com/office/drawing/2014/main" id="{FE5B34C2-05A8-ECB8-69C0-FB7F7B9DB954}"/>
+              </a:ext>
+            </a:extLst>
+          </p:cNvPr>
+          <p:cNvPicPr>
+            <a:picLocks/>
+          </p:cNvPicPr>
+          <p:nvPr/>
+        </p:nvPicPr>
+        <p:blipFill>
+          <a:blip r:embed="rId8">
+            <a:extLst>
+              <a:ext uri="{96DAC541-7B7A-43D3-8B79-37D633B846F1}">
+                <asvg:svgBlip xmlns:asvg="http://schemas.microsoft.com/office/drawing/2016/SVG/main" r:embed="rId9"/>
+              </a:ext>
+            </a:extLst>
+          </a:blip>
+          <a:stretch>
+            <a:fillRect/>
+          </a:stretch>
+        </p:blipFill>
+        <p:spPr>
+          <a:xfrm>
+            <a:off x="296462" y="6190785"/>
+            <a:ext cx="296462" cy="296462"/>
+          </a:xfrm>
+          <a:prstGeom prst="rect">
+            <a:avLst/>
+          </a:prstGeom>
+        </p:spPr>
+      </p:pic>
+      <p:sp>
+        <p:nvSpPr>
+          <p:cNvPr id="7" name="Trapezoid 6">
+            <a:extLst>
+              <a:ext uri="{FF2B5EF4-FFF2-40B4-BE49-F238E27FC236}">
+                <a16:creationId xmlns:a16="http://schemas.microsoft.com/office/drawing/2014/main" id="{859FDE97-A1FA-9DDA-BE0E-84EDB46A55C6}"/>
+              </a:ext>
+            </a:extLst>
+          </p:cNvPr>
+          <p:cNvSpPr/>
+          <p:nvPr/>
+        </p:nvSpPr>
+        <p:spPr>
+          <a:xfrm rot="2700000">
+            <a:off x="9620371" y="514924"/>
+            <a:ext cx="3335198" cy="778213"/>
+          </a:xfrm>
+          <a:prstGeom prst="trapezoid">
+            <a:avLst>
+              <a:gd name="adj" fmla="val 100000"/>
+            </a:avLst>
+          </a:prstGeom>
+          <a:solidFill>
+            <a:srgbClr val="EDFAF2"/>
+          </a:solidFill>
+          <a:ln w="25400" cap="flat" cmpd="sng" algn="ctr">
+            <a:noFill/>
+            <a:prstDash val="solid"/>
+          </a:ln>
+          <a:effectLst/>
+          <a:extLst>
+            <a:ext uri="{91240B29-F687-4F45-9708-019B960494DF}">
+              <a14:hiddenLine xmlns:a14="http://schemas.microsoft.com/office/drawing/2010/main" w="25400" cap="flat" cmpd="sng" algn="ctr">
+                <a:solidFill>
+                  <a:schemeClr val="accent1">
+                    <a:shade val="15000"/>
+                  </a:schemeClr>
+                </a:solidFill>
+                <a:prstDash val="solid"/>
+              </a14:hiddenLine>
+            </a:ext>
+          </a:extLst>
+        </p:spPr>
+        <p:style>
+          <a:lnRef idx="2">
+            <a:schemeClr val="accent1">
+              <a:shade val="15000"/>
+            </a:schemeClr>
+          </a:lnRef>
+          <a:fillRef idx="1">
+            <a:schemeClr val="accent1"/>
+          </a:fillRef>
+          <a:effectRef idx="0">
+            <a:schemeClr val="accent1"/>
+          </a:effectRef>
+          <a:fontRef idx="minor">
+            <a:schemeClr val="lt1"/>
+          </a:fontRef>
+        </p:style>
+        <p:txBody>
+          <a:bodyPr tIns="0" bIns="0" rtlCol="0" anchor="t">
+            <a:normAutofit fontScale="70000" lnSpcReduction="20000"/>
+          </a:bodyPr>
+          <a:lstStyle/>
+          <a:p>
+            <a:pPr algn="ctr"/>
+            <a:r>
+              <a:rPr lang="en-US" sz="2600" b="1">
+                <a:solidFill>
+                  <a:srgbClr val="198038"/>
+                </a:solidFill>
+              </a:rPr>
+              <a:t>Do not edit
+</a:t>
+            </a:r>
+            <a:r>
+              <a:rPr lang="en-US" sz="2200">
+                <a:solidFill>
+                  <a:srgbClr val="198038"/>
+                </a:solidFill>
+                <a:hlinkClick r:id="rId10">
+                  <a:extLst>
+                    <a:ext uri="{A12FA001-AC4F-418D-AE19-62706E023703}">
+                      <ahyp:hlinkClr xmlns:ahyp="http://schemas.microsoft.com/office/drawing/2018/hyperlinkcolor" val="tx"/>
+                    </a:ext>
+                  </a:extLst>
+                </a:hlinkClick>
+              </a:rPr>
+              <a:t>How to change the design</a:t>
+            </a:r>
+            <a:endParaRPr lang="en-US" sz="2200">
+              <a:solidFill>
+                <a:srgbClr val="198038"/>
+              </a:solidFill>
+            </a:endParaRPr>
+          </a:p>
+        </p:txBody>
+      </p:sp>
+      <p:pic>
+        <p:nvPicPr>
+          <p:cNvPr id="9" name="Graphic 8">
+            <a:extLst>
+              <a:ext uri="{FF2B5EF4-FFF2-40B4-BE49-F238E27FC236}">
+                <a16:creationId xmlns:a16="http://schemas.microsoft.com/office/drawing/2014/main" id="{8B0E3C63-3EDD-10BF-DAEE-935332753BDC}"/>
+              </a:ext>
+            </a:extLst>
+          </p:cNvPr>
+          <p:cNvPicPr>
+            <a:picLocks/>
+          </p:cNvPicPr>
+          <p:nvPr/>
+        </p:nvPicPr>
+        <p:blipFill>
+          <a:blip r:embed="rId11">
+            <a:extLst>
+              <a:ext uri="{96DAC541-7B7A-43D3-8B79-37D633B846F1}">
+                <asvg:svgBlip xmlns:asvg="http://schemas.microsoft.com/office/drawing/2016/SVG/main" r:embed="rId12"/>
+              </a:ext>
+            </a:extLst>
+          </a:blip>
+          <a:stretch>
+            <a:fillRect/>
+          </a:stretch>
+        </p:blipFill>
+        <p:spPr>
+          <a:xfrm>
+            <a:off x="10746748" y="6153727"/>
+            <a:ext cx="1111733" cy="370578"/>
+          </a:xfrm>
+          <a:prstGeom prst="rect">
+            <a:avLst/>
+          </a:prstGeom>
+        </p:spPr>
+      </p:pic>
     </p:spTree>
+    <p:custDataLst>
+      <p:tags r:id="rId1"/>
+    </p:custDataLst>
     <p:extLst>
       <p:ext uri="{BB962C8B-B14F-4D97-AF65-F5344CB8AC3E}">
-        <p14:creationId xmlns:p14="http://schemas.microsoft.com/office/powerpoint/2010/main" val="3155436632"/>
+        <p14:creationId xmlns:p14="http://schemas.microsoft.com/office/powerpoint/2010/main" val="340250850"/>
       </p:ext>
     </p:extLst>
   </p:cSld>
   <p:clrMapOvr>
     <a:masterClrMapping/>
   </p:clrMapOvr>
+  <p:timing>
+    <p:tnLst>
+      <p:par>
+        <p:cTn id="1" dur="indefinite" restart="never" nodeType="tmRoot">
+          <p:childTnLst>
+            <p:seq concurrent="1" nextAc="seek">
+              <p:cTn id="2" dur="indefinite" nodeType="mainSeq">
+                <p:childTnLst>
+                  <p:par>
+                    <p:cTn id="3" fill="hold">
+                      <p:stCondLst>
+                        <p:cond delay="indefinite"/>
+                      </p:stCondLst>
+                      <p:childTnLst>
+                        <p:par>
+                          <p:cTn id="4" fill="hold">
+                            <p:stCondLst>
+                              <p:cond delay="0"/>
+                            </p:stCondLst>
+                            <p:childTnLst>
+                              <p:par>
+                                <p:cTn id="5" presetID="26" presetClass="emph" presetSubtype="0" fill="hold" grpId="0" nodeType="clickEffect">
+                                  <p:stCondLst>
+                                    <p:cond delay="0"/>
+                                  </p:stCondLst>
+                                  <p:childTnLst>
+                                    <p:animEffect transition="out" filter="fade">
+                                      <p:cBhvr>
+                                        <p:cTn id="6" dur="50" tmFilter="0, 0; .2, .5; .8, .5; 1, 0"/>
+                                        <p:tgtEl>
+                                          <p:spTgt spid="3"/>
+                                        </p:tgtEl>
+                                      </p:cBhvr>
+                                    </p:animEffect>
+                                    <p:animScale>
+                                      <p:cBhvr>
+                                        <p:cTn id="7" dur="25" autoRev="1" fill="hold"/>
+                                        <p:tgtEl>
+                                          <p:spTgt spid="3"/>
+                                        </p:tgtEl>
+                                      </p:cBhvr>
+                                      <p:by x="105000" y="105000"/>
+                                    </p:animScale>
+                                  </p:childTnLst>
+                                </p:cTn>
+                              </p:par>
+                            </p:childTnLst>
+                          </p:cTn>
+                        </p:par>
+                      </p:childTnLst>
+                    </p:cTn>
+                  </p:par>
+                </p:childTnLst>
+              </p:cTn>
+              <p:prevCondLst>
+                <p:cond evt="onPrev" delay="0">
+                  <p:tgtEl>
+                    <p:sldTgt/>
+                  </p:tgtEl>
+                </p:cond>
+              </p:prevCondLst>
+              <p:nextCondLst>
+                <p:cond evt="onNext" delay="0">
+                  <p:tgtEl>
+                    <p:sldTgt/>
+                  </p:tgtEl>
+                </p:cond>
+              </p:nextCondLst>
+            </p:seq>
+          </p:childTnLst>
+        </p:cTn>
+      </p:par>
+    </p:tnLst>
+    <p:bldLst>
+      <p:bldP spid="3" grpId="0" animBg="1"/>
+    </p:bldLst>
+  </p:timing>
 </p:sld>
 </file>
 
 <file path=ppt/slides/slide5.xml><?xml version="1.0" encoding="utf-8"?>
-<p:sld xmlns:a="http://schemas.openxmlformats.org/drawingml/2006/main" xmlns:r="http://schemas.openxmlformats.org/officeDocument/2006/relationships" xmlns:p="http://schemas.openxmlformats.org/presentationml/2006/main" show="0">
-  <p:cSld>
-    <p:spTree>
-      <p:nvGrpSpPr>
-        <p:cNvPr id="1" name=""/>
-        <p:cNvGrpSpPr/>
-        <p:nvPr/>
-      </p:nvGrpSpPr>
-      <p:grpSpPr>
-        <a:xfrm>
-          <a:off x="0" y="0"/>
-          <a:ext cx="0" cy="0"/>
-          <a:chOff x="0" y="0"/>
-          <a:chExt cx="0" cy="0"/>
-        </a:xfrm>
-      </p:grpSpPr>
-      <p:sp>
-        <p:nvSpPr>
-          <p:cNvPr id="3" name="Title 2">
-            <a:extLst>
-              <a:ext uri="{FF2B5EF4-FFF2-40B4-BE49-F238E27FC236}">
-                <a16:creationId xmlns:a16="http://schemas.microsoft.com/office/drawing/2014/main" id="{9323871C-7CA8-1448-8FFC-1AE6E1838941}"/>
-              </a:ext>
-            </a:extLst>
-          </p:cNvPr>
-          <p:cNvSpPr>
-            <a:spLocks noGrp="1"/>
-          </p:cNvSpPr>
-          <p:nvPr>
-            <p:ph type="title"/>
-          </p:nvPr>
-        </p:nvSpPr>
-        <p:spPr/>
-        <p:txBody>
-          <a:bodyPr/>
-          <a:lstStyle/>
-          <a:p>
-            <a:r>
-              <a:rPr lang="en-US" dirty="0"/>
-              <a:t>Plan for today</a:t>
-            </a:r>
-          </a:p>
-        </p:txBody>
-      </p:sp>
-      <p:sp>
-        <p:nvSpPr>
-          <p:cNvPr id="4" name="Text Placeholder 3">
-            <a:extLst>
-              <a:ext uri="{FF2B5EF4-FFF2-40B4-BE49-F238E27FC236}">
-                <a16:creationId xmlns:a16="http://schemas.microsoft.com/office/drawing/2014/main" id="{5E600BA7-FA45-884F-9820-9E5F2CB7AA48}"/>
-              </a:ext>
-            </a:extLst>
-          </p:cNvPr>
-          <p:cNvSpPr>
-            <a:spLocks noGrp="1"/>
-          </p:cNvSpPr>
-          <p:nvPr>
-            <p:ph type="body" idx="1"/>
-          </p:nvPr>
-        </p:nvSpPr>
-        <p:spPr/>
-        <p:txBody>
-          <a:bodyPr/>
-          <a:lstStyle/>
-          <a:p>
-            <a:r>
-              <a:rPr lang="en-US" dirty="0"/>
-              <a:t>Working with your team</a:t>
-            </a:r>
-            <a:br>
-              <a:rPr lang="en-US" dirty="0"/>
-            </a:br>
-            <a:endParaRPr lang="en-US" dirty="0"/>
-          </a:p>
-          <a:p>
-            <a:r>
-              <a:rPr lang="en-US" dirty="0"/>
-              <a:t>Team meeting: planning for working together (~10 minutes)</a:t>
-            </a:r>
-            <a:br>
-              <a:rPr lang="en-US" dirty="0"/>
-            </a:br>
-            <a:endParaRPr lang="en-US" dirty="0"/>
-          </a:p>
-          <a:p>
-            <a:r>
-              <a:rPr lang="en-US" dirty="0"/>
-              <a:t>Data exploration overview and helpful tips</a:t>
-            </a:r>
-            <a:br>
-              <a:rPr lang="en-US" b="1" dirty="0"/>
-            </a:br>
-            <a:endParaRPr lang="en-US" b="1" dirty="0"/>
-          </a:p>
-          <a:p>
-            <a:r>
-              <a:rPr lang="en-US" dirty="0"/>
-              <a:t>Time to work on data exploration with your group</a:t>
-            </a:r>
-            <a:br>
-              <a:rPr lang="en-US" dirty="0"/>
-            </a:br>
-            <a:r>
-              <a:rPr lang="en-US" dirty="0"/>
-              <a:t>(~30 minutes at the end of class)</a:t>
-            </a:r>
-          </a:p>
-        </p:txBody>
-      </p:sp>
-    </p:spTree>
-    <p:extLst>
-      <p:ext uri="{BB962C8B-B14F-4D97-AF65-F5344CB8AC3E}">
-        <p14:creationId xmlns:p14="http://schemas.microsoft.com/office/powerpoint/2010/main" val="111603700"/>
-      </p:ext>
-    </p:extLst>
-  </p:cSld>
-  <p:clrMapOvr>
-    <a:masterClrMapping/>
-  </p:clrMapOvr>
-</p:sld>
-</file>
-
-<file path=ppt/slides/slide6.xml><?xml version="1.0" encoding="utf-8"?>
-<p:sld xmlns:a="http://schemas.openxmlformats.org/drawingml/2006/main" xmlns:r="http://schemas.openxmlformats.org/officeDocument/2006/relationships" xmlns:p="http://schemas.openxmlformats.org/presentationml/2006/main" show="0">
+<p:sld xmlns:a="http://schemas.openxmlformats.org/drawingml/2006/main" xmlns:r="http://schemas.openxmlformats.org/officeDocument/2006/relationships" xmlns:p="http://schemas.openxmlformats.org/presentationml/2006/main">
   <p:cSld>
     <p:spTree>
       <p:nvGrpSpPr>
@@ -15213,7 +14791,7 @@
             </a:pPr>
             <a:r>
               <a:rPr lang="en-US" sz="4800" dirty="0"/>
-              <a:t>Working With Your Team</a:t>
+              <a:t>Data Exploration Overview</a:t>
             </a:r>
           </a:p>
         </p:txBody>
@@ -15221,7 +14799,142 @@
     </p:spTree>
     <p:extLst>
       <p:ext uri="{BB962C8B-B14F-4D97-AF65-F5344CB8AC3E}">
-        <p14:creationId xmlns:p14="http://schemas.microsoft.com/office/powerpoint/2010/main" val="3756057737"/>
+        <p14:creationId xmlns:p14="http://schemas.microsoft.com/office/powerpoint/2010/main" val="1330406750"/>
+      </p:ext>
+    </p:extLst>
+  </p:cSld>
+  <p:clrMapOvr>
+    <a:masterClrMapping/>
+  </p:clrMapOvr>
+</p:sld>
+</file>
+
+<file path=ppt/slides/slide6.xml><?xml version="1.0" encoding="utf-8"?>
+<p:sld xmlns:a="http://schemas.openxmlformats.org/drawingml/2006/main" xmlns:r="http://schemas.openxmlformats.org/officeDocument/2006/relationships" xmlns:p="http://schemas.openxmlformats.org/presentationml/2006/main">
+  <p:cSld>
+    <p:spTree>
+      <p:nvGrpSpPr>
+        <p:cNvPr id="1" name=""/>
+        <p:cNvGrpSpPr/>
+        <p:nvPr/>
+      </p:nvGrpSpPr>
+      <p:grpSpPr>
+        <a:xfrm>
+          <a:off x="0" y="0"/>
+          <a:ext cx="0" cy="0"/>
+          <a:chOff x="0" y="0"/>
+          <a:chExt cx="0" cy="0"/>
+        </a:xfrm>
+      </p:grpSpPr>
+      <p:sp>
+        <p:nvSpPr>
+          <p:cNvPr id="2" name="Title 1">
+            <a:extLst>
+              <a:ext uri="{FF2B5EF4-FFF2-40B4-BE49-F238E27FC236}">
+                <a16:creationId xmlns:a16="http://schemas.microsoft.com/office/drawing/2014/main" id="{94CF2A94-A63F-6149-AA28-2E35B60E3D3E}"/>
+              </a:ext>
+            </a:extLst>
+          </p:cNvPr>
+          <p:cNvSpPr>
+            <a:spLocks noGrp="1"/>
+          </p:cNvSpPr>
+          <p:nvPr>
+            <p:ph type="title"/>
+          </p:nvPr>
+        </p:nvSpPr>
+        <p:spPr/>
+        <p:txBody>
+          <a:bodyPr/>
+          <a:lstStyle/>
+          <a:p>
+            <a:endParaRPr lang="en-US"/>
+          </a:p>
+        </p:txBody>
+      </p:sp>
+      <p:graphicFrame>
+        <p:nvGraphicFramePr>
+          <p:cNvPr id="3" name="Diagram 2">
+            <a:extLst>
+              <a:ext uri="{FF2B5EF4-FFF2-40B4-BE49-F238E27FC236}">
+                <a16:creationId xmlns:a16="http://schemas.microsoft.com/office/drawing/2014/main" id="{8E902576-68A9-6E48-B0FE-5B1889953DC8}"/>
+              </a:ext>
+            </a:extLst>
+          </p:cNvPr>
+          <p:cNvGraphicFramePr/>
+          <p:nvPr>
+            <p:extLst>
+              <p:ext uri="{D42A27DB-BD31-4B8C-83A1-F6EECF244321}">
+                <p14:modId xmlns:p14="http://schemas.microsoft.com/office/powerpoint/2010/main" val="1737878827"/>
+              </p:ext>
+            </p:extLst>
+          </p:nvPr>
+        </p:nvGraphicFramePr>
+        <p:xfrm>
+          <a:off x="180467" y="0"/>
+          <a:ext cx="11776400" cy="6858000"/>
+        </p:xfrm>
+        <a:graphic>
+          <a:graphicData uri="http://schemas.openxmlformats.org/drawingml/2006/diagram">
+            <dgm:relIds xmlns:dgm="http://schemas.openxmlformats.org/drawingml/2006/diagram" xmlns:r="http://schemas.openxmlformats.org/officeDocument/2006/relationships" r:dm="rId2" r:lo="rId3" r:qs="rId4" r:cs="rId5"/>
+          </a:graphicData>
+        </a:graphic>
+      </p:graphicFrame>
+      <p:sp>
+        <p:nvSpPr>
+          <p:cNvPr id="4" name="Rectangle 3">
+            <a:extLst>
+              <a:ext uri="{FF2B5EF4-FFF2-40B4-BE49-F238E27FC236}">
+                <a16:creationId xmlns:a16="http://schemas.microsoft.com/office/drawing/2014/main" id="{E2C99BF2-C81A-5246-89D3-E49BCDCAD699}"/>
+              </a:ext>
+            </a:extLst>
+          </p:cNvPr>
+          <p:cNvSpPr/>
+          <p:nvPr/>
+        </p:nvSpPr>
+        <p:spPr>
+          <a:xfrm>
+            <a:off x="6377498" y="274320"/>
+            <a:ext cx="2534195" cy="1789611"/>
+          </a:xfrm>
+          <a:prstGeom prst="rect">
+            <a:avLst/>
+          </a:prstGeom>
+          <a:noFill/>
+          <a:ln w="76200">
+            <a:solidFill>
+              <a:srgbClr val="C00000"/>
+            </a:solidFill>
+          </a:ln>
+        </p:spPr>
+        <p:style>
+          <a:lnRef idx="2">
+            <a:schemeClr val="accent1">
+              <a:shade val="50000"/>
+            </a:schemeClr>
+          </a:lnRef>
+          <a:fillRef idx="1">
+            <a:schemeClr val="accent1"/>
+          </a:fillRef>
+          <a:effectRef idx="0">
+            <a:schemeClr val="accent1"/>
+          </a:effectRef>
+          <a:fontRef idx="minor">
+            <a:schemeClr val="lt1"/>
+          </a:fontRef>
+        </p:style>
+        <p:txBody>
+          <a:bodyPr rtlCol="0" anchor="ctr"/>
+          <a:lstStyle/>
+          <a:p>
+            <a:pPr algn="ctr"/>
+            <a:endParaRPr lang="en-US"/>
+          </a:p>
+        </p:txBody>
+      </p:sp>
+    </p:spTree>
+    <p:extLst>
+      <p:ext uri="{BB962C8B-B14F-4D97-AF65-F5344CB8AC3E}">
+        <p14:creationId xmlns:p14="http://schemas.microsoft.com/office/powerpoint/2010/main" val="2624855364"/>
       </p:ext>
     </p:extLst>
   </p:cSld>
@@ -15232,7 +14945,236 @@
 </file>
 
 <file path=ppt/slides/slide7.xml><?xml version="1.0" encoding="utf-8"?>
-<p:sld xmlns:a="http://schemas.openxmlformats.org/drawingml/2006/main" xmlns:r="http://schemas.openxmlformats.org/officeDocument/2006/relationships" xmlns:p="http://schemas.openxmlformats.org/presentationml/2006/main" show="0">
+<p:sld xmlns:a="http://schemas.openxmlformats.org/drawingml/2006/main" xmlns:r="http://schemas.openxmlformats.org/officeDocument/2006/relationships" xmlns:p="http://schemas.openxmlformats.org/presentationml/2006/main">
+  <p:cSld>
+    <p:spTree>
+      <p:nvGrpSpPr>
+        <p:cNvPr id="1" name=""/>
+        <p:cNvGrpSpPr/>
+        <p:nvPr/>
+      </p:nvGrpSpPr>
+      <p:grpSpPr>
+        <a:xfrm>
+          <a:off x="0" y="0"/>
+          <a:ext cx="0" cy="0"/>
+          <a:chOff x="0" y="0"/>
+          <a:chExt cx="0" cy="0"/>
+        </a:xfrm>
+      </p:grpSpPr>
+      <p:sp>
+        <p:nvSpPr>
+          <p:cNvPr id="2" name="Title 1">
+            <a:extLst>
+              <a:ext uri="{FF2B5EF4-FFF2-40B4-BE49-F238E27FC236}">
+                <a16:creationId xmlns:a16="http://schemas.microsoft.com/office/drawing/2014/main" id="{21359BA9-BA2B-D148-89DA-A99081B1FF81}"/>
+              </a:ext>
+            </a:extLst>
+          </p:cNvPr>
+          <p:cNvSpPr>
+            <a:spLocks noGrp="1"/>
+          </p:cNvSpPr>
+          <p:nvPr>
+            <p:ph type="title"/>
+          </p:nvPr>
+        </p:nvSpPr>
+        <p:spPr/>
+        <p:txBody>
+          <a:bodyPr/>
+          <a:lstStyle/>
+          <a:p>
+            <a:r>
+              <a:rPr lang="en-US" dirty="0"/>
+              <a:t>Why is data exploration important?</a:t>
+            </a:r>
+          </a:p>
+        </p:txBody>
+      </p:sp>
+    </p:spTree>
+    <p:extLst>
+      <p:ext uri="{BB962C8B-B14F-4D97-AF65-F5344CB8AC3E}">
+        <p14:creationId xmlns:p14="http://schemas.microsoft.com/office/powerpoint/2010/main" val="1721185332"/>
+      </p:ext>
+    </p:extLst>
+  </p:cSld>
+  <p:clrMapOvr>
+    <a:masterClrMapping/>
+  </p:clrMapOvr>
+</p:sld>
+</file>
+
+<file path=ppt/slides/slide8.xml><?xml version="1.0" encoding="utf-8"?>
+<p:sld xmlns:a="http://schemas.openxmlformats.org/drawingml/2006/main" xmlns:r="http://schemas.openxmlformats.org/officeDocument/2006/relationships" xmlns:p="http://schemas.openxmlformats.org/presentationml/2006/main">
+  <p:cSld>
+    <p:spTree>
+      <p:nvGrpSpPr>
+        <p:cNvPr id="1" name=""/>
+        <p:cNvGrpSpPr/>
+        <p:nvPr/>
+      </p:nvGrpSpPr>
+      <p:grpSpPr>
+        <a:xfrm>
+          <a:off x="0" y="0"/>
+          <a:ext cx="0" cy="0"/>
+          <a:chOff x="0" y="0"/>
+          <a:chExt cx="0" cy="0"/>
+        </a:xfrm>
+      </p:grpSpPr>
+      <p:sp>
+        <p:nvSpPr>
+          <p:cNvPr id="2" name="Title 1">
+            <a:extLst>
+              <a:ext uri="{FF2B5EF4-FFF2-40B4-BE49-F238E27FC236}">
+                <a16:creationId xmlns:a16="http://schemas.microsoft.com/office/drawing/2014/main" id="{21359BA9-BA2B-D148-89DA-A99081B1FF81}"/>
+              </a:ext>
+            </a:extLst>
+          </p:cNvPr>
+          <p:cNvSpPr>
+            <a:spLocks noGrp="1"/>
+          </p:cNvSpPr>
+          <p:nvPr>
+            <p:ph type="title"/>
+          </p:nvPr>
+        </p:nvSpPr>
+        <p:spPr/>
+        <p:txBody>
+          <a:bodyPr/>
+          <a:lstStyle/>
+          <a:p>
+            <a:r>
+              <a:rPr lang="en-US" dirty="0"/>
+              <a:t>Why is data exploration important?</a:t>
+            </a:r>
+          </a:p>
+        </p:txBody>
+      </p:sp>
+      <p:sp>
+        <p:nvSpPr>
+          <p:cNvPr id="3" name="Text Placeholder 2">
+            <a:extLst>
+              <a:ext uri="{FF2B5EF4-FFF2-40B4-BE49-F238E27FC236}">
+                <a16:creationId xmlns:a16="http://schemas.microsoft.com/office/drawing/2014/main" id="{DDA03E0F-5F3D-5B4D-8232-BF72B84A198E}"/>
+              </a:ext>
+            </a:extLst>
+          </p:cNvPr>
+          <p:cNvSpPr>
+            <a:spLocks noGrp="1"/>
+          </p:cNvSpPr>
+          <p:nvPr>
+            <p:ph type="body" idx="1"/>
+          </p:nvPr>
+        </p:nvSpPr>
+        <p:spPr>
+          <a:xfrm>
+            <a:off x="415600" y="1536632"/>
+            <a:ext cx="11360700" cy="5000091"/>
+          </a:xfrm>
+        </p:spPr>
+        <p:txBody>
+          <a:bodyPr/>
+          <a:lstStyle/>
+          <a:p>
+            <a:pPr marL="533400" indent="-457200">
+              <a:buFont typeface="+mj-lt"/>
+              <a:buAutoNum type="arabicPeriod"/>
+            </a:pPr>
+            <a:r>
+              <a:rPr lang="en-US" dirty="0"/>
+              <a:t>Sanity Check the data you were given</a:t>
+            </a:r>
+            <a:br>
+              <a:rPr lang="en-US" dirty="0"/>
+            </a:br>
+            <a:endParaRPr lang="en-US" dirty="0"/>
+          </a:p>
+          <a:p>
+            <a:pPr marL="533400" indent="-457200">
+              <a:buFont typeface="+mj-lt"/>
+              <a:buAutoNum type="arabicPeriod"/>
+            </a:pPr>
+            <a:r>
+              <a:rPr lang="en-US" dirty="0"/>
+              <a:t>Understanding the problem and domain </a:t>
+            </a:r>
+            <a:br>
+              <a:rPr lang="en-US" dirty="0"/>
+            </a:br>
+            <a:endParaRPr lang="en-US" dirty="0"/>
+          </a:p>
+          <a:p>
+            <a:pPr marL="533400" indent="-457200">
+              <a:buFont typeface="+mj-lt"/>
+              <a:buAutoNum type="arabicPeriod"/>
+            </a:pPr>
+            <a:r>
+              <a:rPr lang="en-US" dirty="0"/>
+              <a:t>Problem Formulation </a:t>
+            </a:r>
+            <a:br>
+              <a:rPr lang="en-US" dirty="0"/>
+            </a:br>
+            <a:endParaRPr lang="en-US" dirty="0"/>
+          </a:p>
+          <a:p>
+            <a:pPr marL="533400" indent="-457200">
+              <a:buFont typeface="+mj-lt"/>
+              <a:buAutoNum type="arabicPeriod"/>
+            </a:pPr>
+            <a:r>
+              <a:rPr lang="en-US" dirty="0"/>
+              <a:t>Debugging </a:t>
+            </a:r>
+            <a:br>
+              <a:rPr lang="en-US" dirty="0"/>
+            </a:br>
+            <a:endParaRPr lang="en-US" dirty="0"/>
+          </a:p>
+          <a:p>
+            <a:pPr marL="533400" indent="-457200">
+              <a:buFont typeface="+mj-lt"/>
+              <a:buAutoNum type="arabicPeriod"/>
+            </a:pPr>
+            <a:r>
+              <a:rPr lang="en-US" dirty="0"/>
+              <a:t>Feature Generation/Selection </a:t>
+            </a:r>
+            <a:br>
+              <a:rPr lang="en-US" dirty="0"/>
+            </a:br>
+            <a:endParaRPr lang="en-US" dirty="0"/>
+          </a:p>
+          <a:p>
+            <a:pPr marL="533400" indent="-457200">
+              <a:buFont typeface="+mj-lt"/>
+              <a:buAutoNum type="arabicPeriod"/>
+            </a:pPr>
+            <a:r>
+              <a:rPr lang="en-US" dirty="0"/>
+              <a:t>Interpretation of results </a:t>
+            </a:r>
+          </a:p>
+          <a:p>
+            <a:pPr marL="76200" indent="0">
+              <a:buNone/>
+            </a:pPr>
+            <a:endParaRPr lang="en-US" dirty="0"/>
+          </a:p>
+        </p:txBody>
+      </p:sp>
+    </p:spTree>
+    <p:extLst>
+      <p:ext uri="{BB962C8B-B14F-4D97-AF65-F5344CB8AC3E}">
+        <p14:creationId xmlns:p14="http://schemas.microsoft.com/office/powerpoint/2010/main" val="2094209390"/>
+      </p:ext>
+    </p:extLst>
+  </p:cSld>
+  <p:clrMapOvr>
+    <a:masterClrMapping/>
+  </p:clrMapOvr>
+</p:sld>
+</file>
+
+<file path=ppt/slides/slide9.xml><?xml version="1.0" encoding="utf-8"?>
+<p:sld xmlns:a="http://schemas.openxmlformats.org/drawingml/2006/main" xmlns:r="http://schemas.openxmlformats.org/officeDocument/2006/relationships" xmlns:p="http://schemas.openxmlformats.org/presentationml/2006/main">
   <p:cSld>
     <p:spTree>
       <p:nvGrpSpPr>
@@ -15265,7 +15207,7 @@
           <a:p>
             <a:r>
               <a:rPr lang="en-US" altLang="en-US" dirty="0"/>
-              <a:t> Working with Your Project Team</a:t>
+              <a:t> Simple task for data exploration</a:t>
             </a:r>
           </a:p>
         </p:txBody>
@@ -15285,101 +15227,38 @@
           <a:bodyPr/>
           <a:lstStyle/>
           <a:p>
-            <a:pPr>
-              <a:lnSpc>
-                <a:spcPct val="150000"/>
-              </a:lnSpc>
-            </a:pPr>
             <a:r>
-              <a:rPr lang="en-US" altLang="en-US" dirty="0"/>
-              <a:t>Teams designed to balance skills, backgrounds, and experiences</a:t>
+              <a:rPr lang="en-US" dirty="0"/>
+              <a:t>Write a SQL query that takes a “id” (e.g., student, voter, facility, bill, person, entity, </a:t>
+            </a:r>
+            <a:r>
+              <a:rPr lang="en-US" dirty="0" err="1"/>
+              <a:t>etc</a:t>
+            </a:r>
+            <a:r>
+              <a:rPr lang="en-US" dirty="0"/>
+              <a:t>) and gives you everything you know about that entity/person. </a:t>
             </a:r>
             <a:br>
-              <a:rPr lang="en-US" altLang="en-US" dirty="0"/>
+              <a:rPr lang="en-US" dirty="0"/>
             </a:br>
-            <a:endParaRPr lang="en-US" altLang="en-US" dirty="0"/>
+            <a:endParaRPr lang="en-US" dirty="0"/>
           </a:p>
           <a:p>
-            <a:pPr>
-              <a:lnSpc>
-                <a:spcPct val="150000"/>
-              </a:lnSpc>
-            </a:pPr>
             <a:r>
-              <a:rPr lang="en-US" altLang="en-US" dirty="0"/>
-              <a:t>Spend some time up front figuring out how to work as a team and work styles</a:t>
+              <a:rPr lang="en-US" dirty="0"/>
+              <a:t>Add a date parameter to it to give you everything about that entity up to that date </a:t>
             </a:r>
-            <a:br>
-              <a:rPr lang="en-US" altLang="en-US" dirty="0"/>
-            </a:br>
-            <a:endParaRPr lang="en-US" altLang="en-US" dirty="0"/>
-          </a:p>
-          <a:p>
-            <a:pPr>
-              <a:lnSpc>
-                <a:spcPct val="150000"/>
-              </a:lnSpc>
-            </a:pPr>
-            <a:r>
-              <a:rPr lang="en-US" altLang="en-US" dirty="0"/>
-              <a:t>Everyone should participate in </a:t>
-            </a:r>
-            <a:r>
-              <a:rPr lang="en-US" altLang="en-US" b="1" dirty="0">
-                <a:solidFill>
-                  <a:srgbClr val="FF0000"/>
-                </a:solidFill>
-              </a:rPr>
-              <a:t>all</a:t>
-            </a:r>
-            <a:r>
-              <a:rPr lang="en-US" altLang="en-US" dirty="0"/>
-              <a:t> aspects of project</a:t>
-            </a:r>
-          </a:p>
-          <a:p>
-            <a:pPr lvl="1">
-              <a:lnSpc>
-                <a:spcPct val="100000"/>
-              </a:lnSpc>
-            </a:pPr>
-            <a:r>
-              <a:rPr lang="en-US" altLang="en-US" dirty="0"/>
-              <a:t>No individual should do the majority of the python coding, SQL writing, report writing</a:t>
-            </a:r>
-            <a:br>
-              <a:rPr lang="en-US" altLang="en-US" dirty="0"/>
-            </a:br>
-            <a:endParaRPr lang="en-US" altLang="en-US" dirty="0"/>
-          </a:p>
-          <a:p>
-            <a:pPr>
-              <a:lnSpc>
-                <a:spcPct val="150000"/>
-              </a:lnSpc>
-            </a:pPr>
-            <a:r>
-              <a:rPr lang="en-US" altLang="en-US" dirty="0"/>
-              <a:t>However, you should divide up different pieces of the work</a:t>
-            </a:r>
-          </a:p>
-          <a:p>
-            <a:pPr lvl="1">
-              <a:lnSpc>
-                <a:spcPct val="100000"/>
-              </a:lnSpc>
-            </a:pPr>
-            <a:r>
-              <a:rPr lang="en-US" altLang="en-US" dirty="0"/>
-              <a:t>For instance, working on different parts of the pipeline code in parallel or splitting up sections of the report</a:t>
-            </a:r>
+            <a:endParaRPr lang="en-US" dirty="0">
+              <a:effectLst/>
+            </a:endParaRPr>
           </a:p>
         </p:txBody>
       </p:sp>
     </p:spTree>
     <p:extLst>
       <p:ext uri="{BB962C8B-B14F-4D97-AF65-F5344CB8AC3E}">
-        <p14:creationId xmlns:p14="http://schemas.microsoft.com/office/powerpoint/2010/main" val="3883283808"/>
+        <p14:creationId xmlns:p14="http://schemas.microsoft.com/office/powerpoint/2010/main" val="2446059493"/>
       </p:ext>
     </p:extLst>
   </p:cSld>
@@ -15389,255 +15268,34 @@
 </p:sld>
 </file>
 
-<file path=ppt/slides/slide8.xml><?xml version="1.0" encoding="utf-8"?>
-<p:sld xmlns:a="http://schemas.openxmlformats.org/drawingml/2006/main" xmlns:r="http://schemas.openxmlformats.org/officeDocument/2006/relationships" xmlns:p="http://schemas.openxmlformats.org/presentationml/2006/main" show="0">
-  <p:cSld>
-    <p:spTree>
-      <p:nvGrpSpPr>
-        <p:cNvPr id="1" name=""/>
-        <p:cNvGrpSpPr/>
-        <p:nvPr/>
-      </p:nvGrpSpPr>
-      <p:grpSpPr>
-        <a:xfrm>
-          <a:off x="0" y="0"/>
-          <a:ext cx="0" cy="0"/>
-          <a:chOff x="0" y="0"/>
-          <a:chExt cx="0" cy="0"/>
-        </a:xfrm>
-      </p:grpSpPr>
-      <p:sp>
-        <p:nvSpPr>
-          <p:cNvPr id="8194" name="Rectangle 2"/>
-          <p:cNvSpPr>
-            <a:spLocks noGrp="1" noChangeArrowheads="1"/>
-          </p:cNvSpPr>
-          <p:nvPr>
-            <p:ph type="title"/>
-          </p:nvPr>
-        </p:nvSpPr>
-        <p:spPr/>
-        <p:txBody>
-          <a:bodyPr/>
-          <a:lstStyle/>
-          <a:p>
-            <a:r>
-              <a:rPr lang="en-US" altLang="en-US" dirty="0"/>
-              <a:t> Working with Your Project Team</a:t>
-            </a:r>
-          </a:p>
-        </p:txBody>
-      </p:sp>
-      <p:sp>
-        <p:nvSpPr>
-          <p:cNvPr id="8195" name="Rectangle 3"/>
-          <p:cNvSpPr>
-            <a:spLocks noGrp="1" noChangeArrowheads="1"/>
-          </p:cNvSpPr>
-          <p:nvPr>
-            <p:ph type="body" idx="1"/>
-          </p:nvPr>
-        </p:nvSpPr>
-        <p:spPr>
-          <a:xfrm>
-            <a:off x="207750" y="1548990"/>
-            <a:ext cx="11776400" cy="4555200"/>
-          </a:xfrm>
-        </p:spPr>
-        <p:txBody>
-          <a:bodyPr/>
-          <a:lstStyle/>
-          <a:p>
-            <a:pPr>
-              <a:lnSpc>
-                <a:spcPct val="150000"/>
-              </a:lnSpc>
-            </a:pPr>
-            <a:r>
-              <a:rPr lang="en-US" altLang="en-US" dirty="0"/>
-              <a:t>We’re providing class time to make it easier to coordinate with your group and get feedback from peers and instructors, but you won’t be able to complete the project just in this allotted time</a:t>
-            </a:r>
-            <a:br>
-              <a:rPr lang="en-US" altLang="en-US" dirty="0"/>
-            </a:br>
-            <a:endParaRPr lang="en-US" altLang="en-US" dirty="0"/>
-          </a:p>
-          <a:p>
-            <a:pPr>
-              <a:lnSpc>
-                <a:spcPct val="150000"/>
-              </a:lnSpc>
-            </a:pPr>
-            <a:r>
-              <a:rPr lang="en-US" altLang="en-US" dirty="0"/>
-              <a:t>Tools for coordination:</a:t>
-            </a:r>
-          </a:p>
-          <a:p>
-            <a:pPr lvl="1">
-              <a:lnSpc>
-                <a:spcPct val="150000"/>
-              </a:lnSpc>
-            </a:pPr>
-            <a:r>
-              <a:rPr lang="en-US" altLang="en-US" dirty="0"/>
-              <a:t>Slack: we’ve created group-level and project-level channels. </a:t>
-            </a:r>
-          </a:p>
-          <a:p>
-            <a:pPr lvl="1">
-              <a:lnSpc>
-                <a:spcPct val="150000"/>
-              </a:lnSpc>
-            </a:pPr>
-            <a:r>
-              <a:rPr lang="en-US" altLang="en-US" dirty="0"/>
-              <a:t>Many good free options for task tracking/management: </a:t>
-            </a:r>
-            <a:r>
-              <a:rPr lang="en-US" altLang="en-US" dirty="0" err="1"/>
-              <a:t>github</a:t>
-            </a:r>
-            <a:r>
-              <a:rPr lang="en-US" altLang="en-US" dirty="0"/>
-              <a:t> issues or project boards, </a:t>
-            </a:r>
-            <a:r>
-              <a:rPr lang="en-US" altLang="en-US" dirty="0" err="1"/>
-              <a:t>trello</a:t>
-            </a:r>
-            <a:r>
-              <a:rPr lang="en-US" altLang="en-US" dirty="0"/>
-              <a:t>, etc.</a:t>
-            </a:r>
-          </a:p>
-        </p:txBody>
-      </p:sp>
-    </p:spTree>
-    <p:extLst>
-      <p:ext uri="{BB962C8B-B14F-4D97-AF65-F5344CB8AC3E}">
-        <p14:creationId xmlns:p14="http://schemas.microsoft.com/office/powerpoint/2010/main" val="2143740766"/>
-      </p:ext>
-    </p:extLst>
-  </p:cSld>
-  <p:clrMapOvr>
-    <a:masterClrMapping/>
-  </p:clrMapOvr>
-</p:sld>
+<file path=ppt/tags/tag1.xml><?xml version="1.0" encoding="utf-8"?>
+<p:tagLst xmlns:a="http://schemas.openxmlformats.org/drawingml/2006/main" xmlns:r="http://schemas.openxmlformats.org/officeDocument/2006/relationships" xmlns:p="http://schemas.openxmlformats.org/presentationml/2006/main">
+  <p:tag name="SLIDO_APP_VERSION" val="1.5.0.0"/>
+  <p:tag name="SLIDO_PRESENTATION_ID" val="46df2339-773e-4de5-8227-a2648ad57b2f"/>
+  <p:tag name="SLIDO_EVENT_UUID" val="606d3060-a568-4588-a241-3a97192e31fe"/>
+  <p:tag name="SLIDO_EVENT_SECTION_UUID" val="07e0abdb-b0f8-4b83-94f8-1a04124a2d9c"/>
+</p:tagLst>
 </file>
 
-<file path=ppt/slides/slide9.xml><?xml version="1.0" encoding="utf-8"?>
-<p:sld xmlns:a="http://schemas.openxmlformats.org/drawingml/2006/main" xmlns:r="http://schemas.openxmlformats.org/officeDocument/2006/relationships" xmlns:p="http://schemas.openxmlformats.org/presentationml/2006/main" show="0">
-  <p:cSld>
-    <p:spTree>
-      <p:nvGrpSpPr>
-        <p:cNvPr id="1" name=""/>
-        <p:cNvGrpSpPr/>
-        <p:nvPr/>
-      </p:nvGrpSpPr>
-      <p:grpSpPr>
-        <a:xfrm>
-          <a:off x="0" y="0"/>
-          <a:ext cx="0" cy="0"/>
-          <a:chOff x="0" y="0"/>
-          <a:chExt cx="0" cy="0"/>
-        </a:xfrm>
-      </p:grpSpPr>
-      <p:sp>
-        <p:nvSpPr>
-          <p:cNvPr id="8194" name="Rectangle 2"/>
-          <p:cNvSpPr>
-            <a:spLocks noGrp="1" noChangeArrowheads="1"/>
-          </p:cNvSpPr>
-          <p:nvPr>
-            <p:ph type="title"/>
-          </p:nvPr>
-        </p:nvSpPr>
-        <p:spPr/>
-        <p:txBody>
-          <a:bodyPr/>
-          <a:lstStyle/>
-          <a:p>
-            <a:r>
-              <a:rPr lang="en-US" altLang="en-US" dirty="0"/>
-              <a:t> Working with Your Project Team</a:t>
-            </a:r>
-          </a:p>
-        </p:txBody>
-      </p:sp>
-      <p:sp>
-        <p:nvSpPr>
-          <p:cNvPr id="8195" name="Rectangle 3"/>
-          <p:cNvSpPr>
-            <a:spLocks noGrp="1" noChangeArrowheads="1"/>
-          </p:cNvSpPr>
-          <p:nvPr>
-            <p:ph type="body" idx="1"/>
-          </p:nvPr>
-        </p:nvSpPr>
-        <p:spPr>
-          <a:xfrm>
-            <a:off x="207750" y="1548990"/>
-            <a:ext cx="11776400" cy="4555200"/>
-          </a:xfrm>
-        </p:spPr>
-        <p:txBody>
-          <a:bodyPr/>
-          <a:lstStyle/>
-          <a:p>
-            <a:pPr>
-              <a:lnSpc>
-                <a:spcPct val="150000"/>
-              </a:lnSpc>
-            </a:pPr>
-            <a:r>
-              <a:rPr lang="en-US" altLang="en-US" dirty="0"/>
-              <a:t>Active participation in the group work throughout the entire semester is required by all the team members, and a very large component of your grade</a:t>
-            </a:r>
-            <a:br>
-              <a:rPr lang="en-US" altLang="en-US" dirty="0"/>
-            </a:br>
-            <a:endParaRPr lang="en-US" altLang="en-US" dirty="0"/>
-          </a:p>
-          <a:p>
-            <a:pPr>
-              <a:lnSpc>
-                <a:spcPct val="150000"/>
-              </a:lnSpc>
-            </a:pPr>
-            <a:r>
-              <a:rPr lang="en-US" altLang="en-US" dirty="0"/>
-              <a:t>Collaboration is encouraged, both within and across teams! Learning from each others’ strengths is a big benefit of group work, and you should feel free to discuss strategies and approaches with other teams (i.e., it’s not a competition)</a:t>
-            </a:r>
-            <a:br>
-              <a:rPr lang="en-US" altLang="en-US" dirty="0"/>
-            </a:br>
-            <a:endParaRPr lang="en-US" altLang="en-US" dirty="0"/>
-          </a:p>
-          <a:p>
-            <a:pPr>
-              <a:lnSpc>
-                <a:spcPct val="150000"/>
-              </a:lnSpc>
-            </a:pPr>
-            <a:r>
-              <a:rPr lang="en-US" altLang="en-US" dirty="0"/>
-              <a:t>Pacing your work is important. You won’t be able to do everything the week before the final report, and if everyone tries to, you’ll break the server.</a:t>
-            </a:r>
-          </a:p>
-        </p:txBody>
-      </p:sp>
-    </p:spTree>
-    <p:extLst>
-      <p:ext uri="{BB962C8B-B14F-4D97-AF65-F5344CB8AC3E}">
-        <p14:creationId xmlns:p14="http://schemas.microsoft.com/office/powerpoint/2010/main" val="2457927461"/>
-      </p:ext>
-    </p:extLst>
-  </p:cSld>
-  <p:clrMapOvr>
-    <a:masterClrMapping/>
-  </p:clrMapOvr>
-</p:sld>
+<file path=ppt/tags/tag2.xml><?xml version="1.0" encoding="utf-8"?>
+<p:tagLst xmlns:a="http://schemas.openxmlformats.org/drawingml/2006/main" xmlns:r="http://schemas.openxmlformats.org/officeDocument/2006/relationships" xmlns:p="http://schemas.openxmlformats.org/presentationml/2006/main">
+  <p:tag name="SLIDO_TYPE" val="SlidoPoll"/>
+  <p:tag name="SLIDO_POLL_UUID" val="8509f90d-b18b-412d-8129-edcb5aded232"/>
+  <p:tag name="SLIDO_TIMELINE" val="W3sic2hvd1Jlc3VsdHMiOmZhbHNlLCJwb2xsUXVlc3Rpb25VdWlkIjoiNmY2ZWY4MzItNmI4OS00YjBiLWEyZjctZmMzZjAwMTEwMjllIn0seyJzaG93UmVzdWx0cyI6dHJ1ZSwicG9sbFF1ZXN0aW9uVXVpZCI6IjZmNmVmODMyLTZiODktNGIwYi1hMmY3LWZjM2YwMDExMDI5ZSJ9XQ=="/>
+</p:tagLst>
+</file>
+
+<file path=ppt/tags/tag3.xml><?xml version="1.0" encoding="utf-8"?>
+<p:tagLst xmlns:a="http://schemas.openxmlformats.org/drawingml/2006/main" xmlns:r="http://schemas.openxmlformats.org/officeDocument/2006/relationships" xmlns:p="http://schemas.openxmlformats.org/presentationml/2006/main">
+  <p:tag name="SLIDO_ELEMENT" val="interaction_image"/>
+  <p:tag name="INTERACTION_TYPE" val="MultipleChoice"/>
+</p:tagLst>
+</file>
+
+<file path=ppt/tags/tag4.xml><?xml version="1.0" encoding="utf-8"?>
+<p:tagLst xmlns:a="http://schemas.openxmlformats.org/drawingml/2006/main" xmlns:r="http://schemas.openxmlformats.org/officeDocument/2006/relationships" xmlns:p="http://schemas.openxmlformats.org/presentationml/2006/main">
+  <p:tag name="SLIDO_ELEMENT" val="title"/>
+</p:tagLst>
 </file>
 
 <file path=ppt/theme/theme1.xml><?xml version="1.0" encoding="utf-8"?>

--- a/Lectures/06-data-exploration.pptx
+++ b/Lectures/06-data-exploration.pptx
@@ -5,7 +5,7 @@
     <p:sldMasterId id="2147483648" r:id="rId1"/>
   </p:sldMasterIdLst>
   <p:notesMasterIdLst>
-    <p:notesMasterId r:id="rId22"/>
+    <p:notesMasterId r:id="rId20"/>
   </p:notesMasterIdLst>
   <p:sldIdLst>
     <p:sldId id="256" r:id="rId2"/>
@@ -17,22 +17,20 @@
     <p:sldId id="282" r:id="rId8"/>
     <p:sldId id="518" r:id="rId9"/>
     <p:sldId id="261" r:id="rId10"/>
-    <p:sldId id="313" r:id="rId11"/>
-    <p:sldId id="517" r:id="rId12"/>
-    <p:sldId id="300" r:id="rId13"/>
-    <p:sldId id="285" r:id="rId14"/>
-    <p:sldId id="283" r:id="rId15"/>
-    <p:sldId id="298" r:id="rId16"/>
-    <p:sldId id="260" r:id="rId17"/>
-    <p:sldId id="311" r:id="rId18"/>
-    <p:sldId id="318" r:id="rId19"/>
-    <p:sldId id="315" r:id="rId20"/>
-    <p:sldId id="519" r:id="rId21"/>
+    <p:sldId id="300" r:id="rId11"/>
+    <p:sldId id="285" r:id="rId12"/>
+    <p:sldId id="283" r:id="rId13"/>
+    <p:sldId id="298" r:id="rId14"/>
+    <p:sldId id="260" r:id="rId15"/>
+    <p:sldId id="311" r:id="rId16"/>
+    <p:sldId id="318" r:id="rId17"/>
+    <p:sldId id="315" r:id="rId18"/>
+    <p:sldId id="519" r:id="rId19"/>
   </p:sldIdLst>
   <p:sldSz cx="12192000" cy="6858000"/>
   <p:notesSz cx="6858000" cy="9144000"/>
   <p:custDataLst>
-    <p:tags r:id="rId23"/>
+    <p:tags r:id="rId21"/>
   </p:custDataLst>
   <p:defaultTextStyle>
     <a:defPPr marR="0" lvl="0" algn="l" rtl="0">
@@ -268,7 +266,7 @@
       <p15:sldGuideLst xmlns:p15="http://schemas.microsoft.com/office/powerpoint/2012/main"/>
     </p:ext>
     <p:ext uri="http://customooxmlschemas.google.com/">
-      <go:slidesCustomData xmlns:go="http://customooxmlschemas.google.com/" xmlns:p15="http://schemas.microsoft.com/office/powerpoint/2012/main" xmlns:p14="http://schemas.microsoft.com/office/powerpoint/2010/main" xmlns:com="http://schemas.openxmlformats.org/drawingml/2006/compatibility" xmlns:pvml="urn:schemas-microsoft-com:office:powerpoint" xmlns:v="urn:schemas-microsoft-com:vml" xmlns:o="urn:schemas-microsoft-com:office:office" xmlns:dgm="http://schemas.openxmlformats.org/drawingml/2006/diagram" xmlns:c="http://schemas.openxmlformats.org/drawingml/2006/chart" xmlns:mv="urn:schemas-microsoft-com:mac:vml" xmlns:mc="http://schemas.openxmlformats.org/markup-compatibility/2006" xmlns="" r:id="rId31" roundtripDataSignature="AMtx7mjFyVUGRZWio+dc9dxzYsimUxNJbg=="/>
+      <go:slidesCustomData xmlns="" xmlns:mc="http://schemas.openxmlformats.org/markup-compatibility/2006" xmlns:mv="urn:schemas-microsoft-com:mac:vml" xmlns:c="http://schemas.openxmlformats.org/drawingml/2006/chart" xmlns:dgm="http://schemas.openxmlformats.org/drawingml/2006/diagram" xmlns:o="urn:schemas-microsoft-com:office:office" xmlns:v="urn:schemas-microsoft-com:vml" xmlns:pvml="urn:schemas-microsoft-com:office:powerpoint" xmlns:com="http://schemas.openxmlformats.org/drawingml/2006/compatibility" xmlns:p14="http://schemas.microsoft.com/office/powerpoint/2010/main" xmlns:p15="http://schemas.microsoft.com/office/powerpoint/2012/main" xmlns:go="http://customooxmlschemas.google.com/" r:id="rId31" roundtripDataSignature="AMtx7mjFyVUGRZWio+dc9dxzYsimUxNJbg=="/>
     </p:ext>
   </p:extLst>
 </p:presentation>
@@ -6576,96 +6574,6 @@
 </p:notes>
 </file>
 
-<file path=ppt/notesSlides/notesSlide2.xml><?xml version="1.0" encoding="utf-8"?>
-<p:notes xmlns:a="http://schemas.openxmlformats.org/drawingml/2006/main" xmlns:r="http://schemas.openxmlformats.org/officeDocument/2006/relationships" xmlns:p="http://schemas.openxmlformats.org/presentationml/2006/main">
-  <p:cSld>
-    <p:spTree>
-      <p:nvGrpSpPr>
-        <p:cNvPr id="1" name=""/>
-        <p:cNvGrpSpPr/>
-        <p:nvPr/>
-      </p:nvGrpSpPr>
-      <p:grpSpPr>
-        <a:xfrm>
-          <a:off x="0" y="0"/>
-          <a:ext cx="0" cy="0"/>
-          <a:chOff x="0" y="0"/>
-          <a:chExt cx="0" cy="0"/>
-        </a:xfrm>
-      </p:grpSpPr>
-      <p:sp>
-        <p:nvSpPr>
-          <p:cNvPr id="2" name="Slide Image Placeholder 1"/>
-          <p:cNvSpPr>
-            <a:spLocks noGrp="1" noRot="1" noChangeAspect="1"/>
-          </p:cNvSpPr>
-          <p:nvPr>
-            <p:ph type="sldImg"/>
-          </p:nvPr>
-        </p:nvSpPr>
-        <p:spPr/>
-      </p:sp>
-      <p:sp>
-        <p:nvSpPr>
-          <p:cNvPr id="3" name="Notes Placeholder 2"/>
-          <p:cNvSpPr>
-            <a:spLocks noGrp="1"/>
-          </p:cNvSpPr>
-          <p:nvPr>
-            <p:ph type="body" idx="1"/>
-          </p:nvPr>
-        </p:nvSpPr>
-        <p:spPr/>
-        <p:txBody>
-          <a:bodyPr/>
-          <a:lstStyle/>
-          <a:p>
-            <a:endParaRPr lang="en-US" dirty="0"/>
-          </a:p>
-        </p:txBody>
-      </p:sp>
-      <p:sp>
-        <p:nvSpPr>
-          <p:cNvPr id="4" name="Slide Number Placeholder 3"/>
-          <p:cNvSpPr>
-            <a:spLocks noGrp="1"/>
-          </p:cNvSpPr>
-          <p:nvPr>
-            <p:ph type="sldNum" sz="quarter" idx="10"/>
-          </p:nvPr>
-        </p:nvSpPr>
-        <p:spPr/>
-        <p:txBody>
-          <a:bodyPr/>
-          <a:lstStyle/>
-          <a:p>
-            <a:pPr>
-              <a:defRPr/>
-            </a:pPr>
-            <a:fld id="{20CBC395-CF3C-A24F-8682-006CE1DBC2D7}" type="slidenum">
-              <a:rPr lang="en-US" smtClean="0"/>
-              <a:pPr>
-                <a:defRPr/>
-              </a:pPr>
-              <a:t>11</a:t>
-            </a:fld>
-            <a:endParaRPr lang="en-US"/>
-          </a:p>
-        </p:txBody>
-      </p:sp>
-    </p:spTree>
-    <p:extLst>
-      <p:ext uri="{BB962C8B-B14F-4D97-AF65-F5344CB8AC3E}">
-        <p14:creationId xmlns:p14="http://schemas.microsoft.com/office/powerpoint/2010/main" val="1717432304"/>
-      </p:ext>
-    </p:extLst>
-  </p:cSld>
-  <p:clrMapOvr>
-    <a:masterClrMapping/>
-  </p:clrMapOvr>
-</p:notes>
-</file>
-
 <file path=ppt/slideLayouts/slideLayout1.xml><?xml version="1.0" encoding="utf-8"?>
 <p:sldLayout xmlns:a="http://schemas.openxmlformats.org/drawingml/2006/main" xmlns:r="http://schemas.openxmlformats.org/officeDocument/2006/relationships" xmlns:p="http://schemas.openxmlformats.org/presentationml/2006/main" matchingName="Title slide" type="title">
   <p:cSld name="TITLE">
@@ -7841,58 +7749,6 @@
         </p:txBody>
       </p:sp>
     </p:spTree>
-  </p:cSld>
-  <p:clrMapOvr>
-    <a:masterClrMapping/>
-  </p:clrMapOvr>
-</p:sldLayout>
-</file>
-
-<file path=ppt/slideLayouts/slideLayout13.xml><?xml version="1.0" encoding="utf-8"?>
-<p:sldLayout xmlns:a="http://schemas.openxmlformats.org/drawingml/2006/main" xmlns:r="http://schemas.openxmlformats.org/officeDocument/2006/relationships" xmlns:p="http://schemas.openxmlformats.org/presentationml/2006/main" type="titleOnly">
-  <p:cSld name="Title Only">
-    <p:spTree>
-      <p:nvGrpSpPr>
-        <p:cNvPr id="1" name=""/>
-        <p:cNvGrpSpPr/>
-        <p:nvPr/>
-      </p:nvGrpSpPr>
-      <p:grpSpPr>
-        <a:xfrm>
-          <a:off x="0" y="0"/>
-          <a:ext cx="0" cy="0"/>
-          <a:chOff x="0" y="0"/>
-          <a:chExt cx="0" cy="0"/>
-        </a:xfrm>
-      </p:grpSpPr>
-      <p:sp>
-        <p:nvSpPr>
-          <p:cNvPr id="2" name="Title 1"/>
-          <p:cNvSpPr>
-            <a:spLocks noGrp="1"/>
-          </p:cNvSpPr>
-          <p:nvPr>
-            <p:ph type="title"/>
-          </p:nvPr>
-        </p:nvSpPr>
-        <p:spPr/>
-        <p:txBody>
-          <a:bodyPr/>
-          <a:lstStyle/>
-          <a:p>
-            <a:r>
-              <a:rPr lang="en-US"/>
-              <a:t>Click to edit Master title style</a:t>
-            </a:r>
-          </a:p>
-        </p:txBody>
-      </p:sp>
-    </p:spTree>
-    <p:extLst>
-      <p:ext uri="{BB962C8B-B14F-4D97-AF65-F5344CB8AC3E}">
-        <p14:creationId xmlns:p14="http://schemas.microsoft.com/office/powerpoint/2010/main" val="1283825340"/>
-      </p:ext>
-    </p:extLst>
   </p:cSld>
   <p:clrMapOvr>
     <a:masterClrMapping/>
@@ -11380,7 +11236,6 @@
     <p:sldLayoutId id="2147483659" r:id="rId10"/>
     <p:sldLayoutId id="2147483660" r:id="rId11"/>
     <p:sldLayoutId id="2147483661" r:id="rId12"/>
-    <p:sldLayoutId id="2147483662" r:id="rId13"/>
   </p:sldLayoutIdLst>
   <p:hf sldNum="0" hdr="0" ftr="0" dt="0"/>
   <p:txStyles>
@@ -12247,701 +12102,6 @@
       </p:grpSpPr>
       <p:sp>
         <p:nvSpPr>
-          <p:cNvPr id="4" name="Text Placeholder 3">
-            <a:extLst>
-              <a:ext uri="{FF2B5EF4-FFF2-40B4-BE49-F238E27FC236}">
-                <a16:creationId xmlns:a16="http://schemas.microsoft.com/office/drawing/2014/main" id="{5E600BA7-FA45-884F-9820-9E5F2CB7AA48}"/>
-              </a:ext>
-            </a:extLst>
-          </p:cNvPr>
-          <p:cNvSpPr>
-            <a:spLocks noGrp="1"/>
-          </p:cNvSpPr>
-          <p:nvPr>
-            <p:ph type="body" idx="1"/>
-          </p:nvPr>
-        </p:nvSpPr>
-        <p:spPr>
-          <a:xfrm>
-            <a:off x="415650" y="2452813"/>
-            <a:ext cx="11360700" cy="1408672"/>
-          </a:xfrm>
-        </p:spPr>
-        <p:txBody>
-          <a:bodyPr/>
-          <a:lstStyle/>
-          <a:p>
-            <a:pPr marL="76200" indent="0" algn="ctr">
-              <a:buNone/>
-            </a:pPr>
-            <a:r>
-              <a:rPr lang="en-US" sz="4800" dirty="0"/>
-              <a:t>Data Exploration Example:</a:t>
-            </a:r>
-          </a:p>
-          <a:p>
-            <a:pPr marL="76200" indent="0" algn="ctr">
-              <a:buNone/>
-            </a:pPr>
-            <a:r>
-              <a:rPr lang="en-US" sz="4800" dirty="0"/>
-              <a:t>Improving On-Time </a:t>
-            </a:r>
-          </a:p>
-          <a:p>
-            <a:pPr marL="76200" indent="0" algn="ctr">
-              <a:buNone/>
-            </a:pPr>
-            <a:r>
-              <a:rPr lang="en-US" sz="4800" dirty="0"/>
-              <a:t>High School Graduation Rates </a:t>
-            </a:r>
-          </a:p>
-        </p:txBody>
-      </p:sp>
-    </p:spTree>
-    <p:extLst>
-      <p:ext uri="{BB962C8B-B14F-4D97-AF65-F5344CB8AC3E}">
-        <p14:creationId xmlns:p14="http://schemas.microsoft.com/office/powerpoint/2010/main" val="4155436006"/>
-      </p:ext>
-    </p:extLst>
-  </p:cSld>
-  <p:clrMapOvr>
-    <a:masterClrMapping/>
-  </p:clrMapOvr>
-</p:sld>
-</file>
-
-<file path=ppt/slides/slide11.xml><?xml version="1.0" encoding="utf-8"?>
-<p:sld xmlns:a="http://schemas.openxmlformats.org/drawingml/2006/main" xmlns:r="http://schemas.openxmlformats.org/officeDocument/2006/relationships" xmlns:p="http://schemas.openxmlformats.org/presentationml/2006/main">
-  <p:cSld>
-    <p:spTree>
-      <p:nvGrpSpPr>
-        <p:cNvPr id="1" name=""/>
-        <p:cNvGrpSpPr/>
-        <p:nvPr/>
-      </p:nvGrpSpPr>
-      <p:grpSpPr>
-        <a:xfrm>
-          <a:off x="0" y="0"/>
-          <a:ext cx="0" cy="0"/>
-          <a:chOff x="0" y="0"/>
-          <a:chExt cx="0" cy="0"/>
-        </a:xfrm>
-      </p:grpSpPr>
-      <p:pic>
-        <p:nvPicPr>
-          <p:cNvPr id="6" name="Picture 5">
-            <a:extLst>
-              <a:ext uri="{FF2B5EF4-FFF2-40B4-BE49-F238E27FC236}">
-                <a16:creationId xmlns:a16="http://schemas.microsoft.com/office/drawing/2014/main" id="{8F936589-61A9-0C4B-9FEF-A2E920B04217}"/>
-              </a:ext>
-            </a:extLst>
-          </p:cNvPr>
-          <p:cNvPicPr>
-            <a:picLocks noChangeAspect="1"/>
-          </p:cNvPicPr>
-          <p:nvPr/>
-        </p:nvPicPr>
-        <p:blipFill>
-          <a:blip r:embed="rId3" cstate="screen">
-            <a:grayscl/>
-            <a:extLst>
-              <a:ext uri="{28A0092B-C50C-407E-A947-70E740481C1C}">
-                <a14:useLocalDpi xmlns:a14="http://schemas.microsoft.com/office/drawing/2010/main"/>
-              </a:ext>
-            </a:extLst>
-          </a:blip>
-          <a:stretch>
-            <a:fillRect/>
-          </a:stretch>
-        </p:blipFill>
-        <p:spPr>
-          <a:xfrm>
-            <a:off x="3388398" y="592779"/>
-            <a:ext cx="946040" cy="1192269"/>
-          </a:xfrm>
-          <a:prstGeom prst="rect">
-            <a:avLst/>
-          </a:prstGeom>
-        </p:spPr>
-      </p:pic>
-      <p:pic>
-        <p:nvPicPr>
-          <p:cNvPr id="8" name="Picture 7">
-            <a:extLst>
-              <a:ext uri="{FF2B5EF4-FFF2-40B4-BE49-F238E27FC236}">
-                <a16:creationId xmlns:a16="http://schemas.microsoft.com/office/drawing/2014/main" id="{ED13AF9C-71A9-7646-8A1E-9388B3D2A6AF}"/>
-              </a:ext>
-            </a:extLst>
-          </p:cNvPr>
-          <p:cNvPicPr>
-            <a:picLocks noChangeAspect="1"/>
-          </p:cNvPicPr>
-          <p:nvPr/>
-        </p:nvPicPr>
-        <p:blipFill>
-          <a:blip r:embed="rId4" cstate="screen">
-            <a:extLst>
-              <a:ext uri="{28A0092B-C50C-407E-A947-70E740481C1C}">
-                <a14:useLocalDpi xmlns:a14="http://schemas.microsoft.com/office/drawing/2010/main"/>
-              </a:ext>
-            </a:extLst>
-          </a:blip>
-          <a:stretch>
-            <a:fillRect/>
-          </a:stretch>
-        </p:blipFill>
-        <p:spPr>
-          <a:xfrm>
-            <a:off x="1854507" y="609712"/>
-            <a:ext cx="920121" cy="1166351"/>
-          </a:xfrm>
-          <a:prstGeom prst="rect">
-            <a:avLst/>
-          </a:prstGeom>
-        </p:spPr>
-      </p:pic>
-      <p:pic>
-        <p:nvPicPr>
-          <p:cNvPr id="9" name="Picture 8">
-            <a:extLst>
-              <a:ext uri="{FF2B5EF4-FFF2-40B4-BE49-F238E27FC236}">
-                <a16:creationId xmlns:a16="http://schemas.microsoft.com/office/drawing/2014/main" id="{065F15D6-D324-E446-986D-1F7A05D8D78F}"/>
-              </a:ext>
-            </a:extLst>
-          </p:cNvPr>
-          <p:cNvPicPr>
-            <a:picLocks noChangeAspect="1"/>
-          </p:cNvPicPr>
-          <p:nvPr/>
-        </p:nvPicPr>
-        <p:blipFill>
-          <a:blip r:embed="rId4" cstate="screen">
-            <a:extLst>
-              <a:ext uri="{28A0092B-C50C-407E-A947-70E740481C1C}">
-                <a14:useLocalDpi xmlns:a14="http://schemas.microsoft.com/office/drawing/2010/main"/>
-              </a:ext>
-            </a:extLst>
-          </a:blip>
-          <a:stretch>
-            <a:fillRect/>
-          </a:stretch>
-        </p:blipFill>
-        <p:spPr>
-          <a:xfrm>
-            <a:off x="320615" y="609712"/>
-            <a:ext cx="920121" cy="1166351"/>
-          </a:xfrm>
-          <a:prstGeom prst="rect">
-            <a:avLst/>
-          </a:prstGeom>
-        </p:spPr>
-      </p:pic>
-      <p:pic>
-        <p:nvPicPr>
-          <p:cNvPr id="10" name="Picture 9">
-            <a:extLst>
-              <a:ext uri="{FF2B5EF4-FFF2-40B4-BE49-F238E27FC236}">
-                <a16:creationId xmlns:a16="http://schemas.microsoft.com/office/drawing/2014/main" id="{79308793-23D6-A549-B646-8B19C3240257}"/>
-              </a:ext>
-            </a:extLst>
-          </p:cNvPr>
-          <p:cNvPicPr>
-            <a:picLocks noChangeAspect="1"/>
-          </p:cNvPicPr>
-          <p:nvPr/>
-        </p:nvPicPr>
-        <p:blipFill>
-          <a:blip r:embed="rId4" cstate="screen">
-            <a:extLst>
-              <a:ext uri="{28A0092B-C50C-407E-A947-70E740481C1C}">
-                <a14:useLocalDpi xmlns:a14="http://schemas.microsoft.com/office/drawing/2010/main"/>
-              </a:ext>
-            </a:extLst>
-          </a:blip>
-          <a:stretch>
-            <a:fillRect/>
-          </a:stretch>
-        </p:blipFill>
-        <p:spPr>
-          <a:xfrm>
-            <a:off x="4956157" y="609712"/>
-            <a:ext cx="920121" cy="1166351"/>
-          </a:xfrm>
-          <a:prstGeom prst="rect">
-            <a:avLst/>
-          </a:prstGeom>
-        </p:spPr>
-      </p:pic>
-      <p:pic>
-        <p:nvPicPr>
-          <p:cNvPr id="11" name="Picture 10">
-            <a:extLst>
-              <a:ext uri="{FF2B5EF4-FFF2-40B4-BE49-F238E27FC236}">
-                <a16:creationId xmlns:a16="http://schemas.microsoft.com/office/drawing/2014/main" id="{6FFBC01B-7BC5-FB4A-8569-49B7C6BF1BF3}"/>
-              </a:ext>
-            </a:extLst>
-          </p:cNvPr>
-          <p:cNvPicPr>
-            <a:picLocks noChangeAspect="1"/>
-          </p:cNvPicPr>
-          <p:nvPr/>
-        </p:nvPicPr>
-        <p:blipFill>
-          <a:blip r:embed="rId4" cstate="screen">
-            <a:extLst>
-              <a:ext uri="{28A0092B-C50C-407E-A947-70E740481C1C}">
-                <a14:useLocalDpi xmlns:a14="http://schemas.microsoft.com/office/drawing/2010/main"/>
-              </a:ext>
-            </a:extLst>
-          </a:blip>
-          <a:stretch>
-            <a:fillRect/>
-          </a:stretch>
-        </p:blipFill>
-        <p:spPr>
-          <a:xfrm>
-            <a:off x="6490051" y="609712"/>
-            <a:ext cx="920121" cy="1166351"/>
-          </a:xfrm>
-          <a:prstGeom prst="rect">
-            <a:avLst/>
-          </a:prstGeom>
-        </p:spPr>
-      </p:pic>
-      <p:pic>
-        <p:nvPicPr>
-          <p:cNvPr id="12" name="Picture 11">
-            <a:extLst>
-              <a:ext uri="{FF2B5EF4-FFF2-40B4-BE49-F238E27FC236}">
-                <a16:creationId xmlns:a16="http://schemas.microsoft.com/office/drawing/2014/main" id="{A326E031-B3A7-F643-B3BA-4BE751467D5E}"/>
-              </a:ext>
-            </a:extLst>
-          </p:cNvPr>
-          <p:cNvPicPr>
-            <a:picLocks noChangeAspect="1"/>
-          </p:cNvPicPr>
-          <p:nvPr/>
-        </p:nvPicPr>
-        <p:blipFill>
-          <a:blip r:embed="rId4" cstate="screen">
-            <a:extLst>
-              <a:ext uri="{28A0092B-C50C-407E-A947-70E740481C1C}">
-                <a14:useLocalDpi xmlns:a14="http://schemas.microsoft.com/office/drawing/2010/main"/>
-              </a:ext>
-            </a:extLst>
-          </a:blip>
-          <a:stretch>
-            <a:fillRect/>
-          </a:stretch>
-        </p:blipFill>
-        <p:spPr>
-          <a:xfrm>
-            <a:off x="3391134" y="2051169"/>
-            <a:ext cx="940568" cy="1192269"/>
-          </a:xfrm>
-          <a:prstGeom prst="rect">
-            <a:avLst/>
-          </a:prstGeom>
-        </p:spPr>
-      </p:pic>
-      <p:pic>
-        <p:nvPicPr>
-          <p:cNvPr id="13" name="Picture 12">
-            <a:extLst>
-              <a:ext uri="{FF2B5EF4-FFF2-40B4-BE49-F238E27FC236}">
-                <a16:creationId xmlns:a16="http://schemas.microsoft.com/office/drawing/2014/main" id="{3CB1D42E-43A5-614F-839B-852CBEDE1980}"/>
-              </a:ext>
-            </a:extLst>
-          </p:cNvPr>
-          <p:cNvPicPr>
-            <a:picLocks noChangeAspect="1"/>
-          </p:cNvPicPr>
-          <p:nvPr/>
-        </p:nvPicPr>
-        <p:blipFill>
-          <a:blip r:embed="rId3" cstate="screen">
-            <a:grayscl/>
-            <a:extLst>
-              <a:ext uri="{28A0092B-C50C-407E-A947-70E740481C1C}">
-                <a14:useLocalDpi xmlns:a14="http://schemas.microsoft.com/office/drawing/2010/main"/>
-              </a:ext>
-            </a:extLst>
-          </a:blip>
-          <a:stretch>
-            <a:fillRect/>
-          </a:stretch>
-        </p:blipFill>
-        <p:spPr>
-          <a:xfrm>
-            <a:off x="1854507" y="2071476"/>
-            <a:ext cx="920121" cy="1159604"/>
-          </a:xfrm>
-          <a:prstGeom prst="rect">
-            <a:avLst/>
-          </a:prstGeom>
-        </p:spPr>
-      </p:pic>
-      <p:pic>
-        <p:nvPicPr>
-          <p:cNvPr id="14" name="Picture 13">
-            <a:extLst>
-              <a:ext uri="{FF2B5EF4-FFF2-40B4-BE49-F238E27FC236}">
-                <a16:creationId xmlns:a16="http://schemas.microsoft.com/office/drawing/2014/main" id="{36CD7D7A-0EBA-0247-B117-6DD9577B65A2}"/>
-              </a:ext>
-            </a:extLst>
-          </p:cNvPr>
-          <p:cNvPicPr>
-            <a:picLocks noChangeAspect="1"/>
-          </p:cNvPicPr>
-          <p:nvPr/>
-        </p:nvPicPr>
-        <p:blipFill>
-          <a:blip r:embed="rId4" cstate="screen">
-            <a:extLst>
-              <a:ext uri="{28A0092B-C50C-407E-A947-70E740481C1C}">
-                <a14:useLocalDpi xmlns:a14="http://schemas.microsoft.com/office/drawing/2010/main"/>
-              </a:ext>
-            </a:extLst>
-          </a:blip>
-          <a:stretch>
-            <a:fillRect/>
-          </a:stretch>
-        </p:blipFill>
-        <p:spPr>
-          <a:xfrm>
-            <a:off x="320615" y="2068103"/>
-            <a:ext cx="920121" cy="1166351"/>
-          </a:xfrm>
-          <a:prstGeom prst="rect">
-            <a:avLst/>
-          </a:prstGeom>
-        </p:spPr>
-      </p:pic>
-      <p:pic>
-        <p:nvPicPr>
-          <p:cNvPr id="15" name="Picture 14">
-            <a:extLst>
-              <a:ext uri="{FF2B5EF4-FFF2-40B4-BE49-F238E27FC236}">
-                <a16:creationId xmlns:a16="http://schemas.microsoft.com/office/drawing/2014/main" id="{09C5329D-1C7F-8742-BB1F-BC83C2C10A02}"/>
-              </a:ext>
-            </a:extLst>
-          </p:cNvPr>
-          <p:cNvPicPr>
-            <a:picLocks noChangeAspect="1"/>
-          </p:cNvPicPr>
-          <p:nvPr/>
-        </p:nvPicPr>
-        <p:blipFill>
-          <a:blip r:embed="rId3" cstate="screen">
-            <a:grayscl/>
-            <a:extLst>
-              <a:ext uri="{28A0092B-C50C-407E-A947-70E740481C1C}">
-                <a14:useLocalDpi xmlns:a14="http://schemas.microsoft.com/office/drawing/2010/main"/>
-              </a:ext>
-            </a:extLst>
-          </a:blip>
-          <a:stretch>
-            <a:fillRect/>
-          </a:stretch>
-        </p:blipFill>
-        <p:spPr>
-          <a:xfrm>
-            <a:off x="4956157" y="2071476"/>
-            <a:ext cx="920121" cy="1159604"/>
-          </a:xfrm>
-          <a:prstGeom prst="rect">
-            <a:avLst/>
-          </a:prstGeom>
-        </p:spPr>
-      </p:pic>
-      <p:pic>
-        <p:nvPicPr>
-          <p:cNvPr id="16" name="Picture 15">
-            <a:extLst>
-              <a:ext uri="{FF2B5EF4-FFF2-40B4-BE49-F238E27FC236}">
-                <a16:creationId xmlns:a16="http://schemas.microsoft.com/office/drawing/2014/main" id="{C7DD7B52-3406-D94B-BDDF-81B01240D37A}"/>
-              </a:ext>
-            </a:extLst>
-          </p:cNvPr>
-          <p:cNvPicPr>
-            <a:picLocks noChangeAspect="1"/>
-          </p:cNvPicPr>
-          <p:nvPr/>
-        </p:nvPicPr>
-        <p:blipFill>
-          <a:blip r:embed="rId4" cstate="screen">
-            <a:extLst>
-              <a:ext uri="{28A0092B-C50C-407E-A947-70E740481C1C}">
-                <a14:useLocalDpi xmlns:a14="http://schemas.microsoft.com/office/drawing/2010/main"/>
-              </a:ext>
-            </a:extLst>
-          </a:blip>
-          <a:stretch>
-            <a:fillRect/>
-          </a:stretch>
-        </p:blipFill>
-        <p:spPr>
-          <a:xfrm>
-            <a:off x="6490051" y="2068103"/>
-            <a:ext cx="920121" cy="1166351"/>
-          </a:xfrm>
-          <a:prstGeom prst="rect">
-            <a:avLst/>
-          </a:prstGeom>
-        </p:spPr>
-      </p:pic>
-      <p:pic>
-        <p:nvPicPr>
-          <p:cNvPr id="4" name="Picture 3">
-            <a:extLst>
-              <a:ext uri="{FF2B5EF4-FFF2-40B4-BE49-F238E27FC236}">
-                <a16:creationId xmlns:a16="http://schemas.microsoft.com/office/drawing/2014/main" id="{E271CE0A-0734-D247-87C1-D4CB44F88DF0}"/>
-              </a:ext>
-            </a:extLst>
-          </p:cNvPr>
-          <p:cNvPicPr>
-            <a:picLocks noChangeAspect="1"/>
-          </p:cNvPicPr>
-          <p:nvPr/>
-        </p:nvPicPr>
-        <p:blipFill rotWithShape="1">
-          <a:blip r:embed="rId5"/>
-          <a:srcRect l="12087" r="12987"/>
-          <a:stretch/>
-        </p:blipFill>
-        <p:spPr>
-          <a:xfrm>
-            <a:off x="320615" y="3810702"/>
-            <a:ext cx="7089557" cy="2376152"/>
-          </a:xfrm>
-          <a:prstGeom prst="rect">
-            <a:avLst/>
-          </a:prstGeom>
-        </p:spPr>
-      </p:pic>
-      <p:sp>
-        <p:nvSpPr>
-          <p:cNvPr id="22" name="Rectangle 21">
-            <a:extLst>
-              <a:ext uri="{FF2B5EF4-FFF2-40B4-BE49-F238E27FC236}">
-                <a16:creationId xmlns:a16="http://schemas.microsoft.com/office/drawing/2014/main" id="{BB1FC301-6DA1-D441-8441-E16D80D0E316}"/>
-              </a:ext>
-            </a:extLst>
-          </p:cNvPr>
-          <p:cNvSpPr/>
-          <p:nvPr/>
-        </p:nvSpPr>
-        <p:spPr>
-          <a:xfrm>
-            <a:off x="7760043" y="194492"/>
-            <a:ext cx="4102443" cy="6363729"/>
-          </a:xfrm>
-          <a:prstGeom prst="rect">
-            <a:avLst/>
-          </a:prstGeom>
-          <a:solidFill>
-            <a:srgbClr val="D9E5F1"/>
-          </a:solidFill>
-          <a:ln>
-            <a:noFill/>
-          </a:ln>
-        </p:spPr>
-        <p:style>
-          <a:lnRef idx="2">
-            <a:schemeClr val="accent1">
-              <a:shade val="50000"/>
-            </a:schemeClr>
-          </a:lnRef>
-          <a:fillRef idx="1">
-            <a:schemeClr val="accent1"/>
-          </a:fillRef>
-          <a:effectRef idx="0">
-            <a:schemeClr val="accent1"/>
-          </a:effectRef>
-          <a:fontRef idx="minor">
-            <a:schemeClr val="lt1"/>
-          </a:fontRef>
-        </p:style>
-        <p:txBody>
-          <a:bodyPr rtlCol="0" anchor="ctr"/>
-          <a:lstStyle/>
-          <a:p>
-            <a:pPr algn="ctr"/>
-            <a:endParaRPr lang="en-US" sz="6000" b="1" dirty="0">
-              <a:solidFill>
-                <a:srgbClr val="0070C0"/>
-              </a:solidFill>
-            </a:endParaRPr>
-          </a:p>
-          <a:p>
-            <a:pPr algn="ctr"/>
-            <a:r>
-              <a:rPr lang="en-US" sz="6000" b="1" dirty="0">
-                <a:solidFill>
-                  <a:srgbClr val="0070C0"/>
-                </a:solidFill>
-              </a:rPr>
-              <a:t>16</a:t>
-            </a:r>
-            <a:r>
-              <a:rPr lang="en-US" sz="3200" b="1" dirty="0">
-                <a:solidFill>
-                  <a:srgbClr val="0070C0"/>
-                </a:solidFill>
-              </a:rPr>
-              <a:t> </a:t>
-            </a:r>
-          </a:p>
-          <a:p>
-            <a:pPr algn="ctr"/>
-            <a:r>
-              <a:rPr lang="en-US" sz="3200" b="1" dirty="0">
-                <a:solidFill>
-                  <a:srgbClr val="0070C0"/>
-                </a:solidFill>
-              </a:rPr>
-              <a:t>School Districts in Rural Ohio</a:t>
-            </a:r>
-          </a:p>
-          <a:p>
-            <a:pPr algn="ctr"/>
-            <a:endParaRPr lang="en-US" sz="3200" b="1" dirty="0">
-              <a:solidFill>
-                <a:srgbClr val="0070C0"/>
-              </a:solidFill>
-            </a:endParaRPr>
-          </a:p>
-          <a:p>
-            <a:pPr algn="ctr"/>
-            <a:r>
-              <a:rPr lang="en-US" sz="6000" b="1" dirty="0">
-                <a:solidFill>
-                  <a:srgbClr val="0070C0"/>
-                </a:solidFill>
-              </a:rPr>
-              <a:t>30,000</a:t>
-            </a:r>
-            <a:r>
-              <a:rPr lang="en-US" sz="3200" b="1" dirty="0">
-                <a:solidFill>
-                  <a:srgbClr val="0070C0"/>
-                </a:solidFill>
-              </a:rPr>
-              <a:t> </a:t>
-            </a:r>
-          </a:p>
-          <a:p>
-            <a:pPr algn="ctr"/>
-            <a:r>
-              <a:rPr lang="en-US" sz="3200" b="1" dirty="0">
-                <a:solidFill>
-                  <a:srgbClr val="0070C0"/>
-                </a:solidFill>
-              </a:rPr>
-              <a:t>Students</a:t>
-            </a:r>
-          </a:p>
-          <a:p>
-            <a:pPr algn="ctr"/>
-            <a:endParaRPr lang="en-US" sz="3200" b="1" dirty="0">
-              <a:solidFill>
-                <a:srgbClr val="0070C0"/>
-              </a:solidFill>
-            </a:endParaRPr>
-          </a:p>
-          <a:p>
-            <a:pPr algn="ctr"/>
-            <a:r>
-              <a:rPr lang="en-US" sz="6000" b="1" dirty="0">
-                <a:solidFill>
-                  <a:srgbClr val="0070C0"/>
-                </a:solidFill>
-              </a:rPr>
-              <a:t>8-10%</a:t>
-            </a:r>
-            <a:r>
-              <a:rPr lang="en-US" sz="3200" b="1" dirty="0">
-                <a:solidFill>
-                  <a:srgbClr val="0070C0"/>
-                </a:solidFill>
-              </a:rPr>
-              <a:t> </a:t>
-            </a:r>
-          </a:p>
-          <a:p>
-            <a:pPr algn="ctr"/>
-            <a:r>
-              <a:rPr lang="en-US" sz="3200" b="1" dirty="0">
-                <a:solidFill>
-                  <a:srgbClr val="0070C0"/>
-                </a:solidFill>
-              </a:rPr>
-              <a:t>Don’t Graduate </a:t>
-            </a:r>
-          </a:p>
-          <a:p>
-            <a:pPr algn="ctr"/>
-            <a:r>
-              <a:rPr lang="en-US" sz="3200" b="1" dirty="0">
-                <a:solidFill>
-                  <a:srgbClr val="0070C0"/>
-                </a:solidFill>
-              </a:rPr>
-              <a:t>On Time</a:t>
-            </a:r>
-          </a:p>
-          <a:p>
-            <a:pPr algn="ctr"/>
-            <a:endParaRPr lang="en-US" sz="3200" b="1" dirty="0">
-              <a:solidFill>
-                <a:srgbClr val="0070C0"/>
-              </a:solidFill>
-            </a:endParaRPr>
-          </a:p>
-          <a:p>
-            <a:pPr algn="ctr"/>
-            <a:endParaRPr lang="en-US" sz="3200" b="1" dirty="0">
-              <a:solidFill>
-                <a:srgbClr val="0070C0"/>
-              </a:solidFill>
-            </a:endParaRPr>
-          </a:p>
-        </p:txBody>
-      </p:sp>
-    </p:spTree>
-    <p:extLst>
-      <p:ext uri="{BB962C8B-B14F-4D97-AF65-F5344CB8AC3E}">
-        <p14:creationId xmlns:p14="http://schemas.microsoft.com/office/powerpoint/2010/main" val="2915221892"/>
-      </p:ext>
-    </p:extLst>
-  </p:cSld>
-  <p:clrMapOvr>
-    <a:masterClrMapping/>
-  </p:clrMapOvr>
-</p:sld>
-</file>
-
-<file path=ppt/slides/slide12.xml><?xml version="1.0" encoding="utf-8"?>
-<p:sld xmlns:a="http://schemas.openxmlformats.org/drawingml/2006/main" xmlns:r="http://schemas.openxmlformats.org/officeDocument/2006/relationships" xmlns:p="http://schemas.openxmlformats.org/presentationml/2006/main">
-  <p:cSld>
-    <p:spTree>
-      <p:nvGrpSpPr>
-        <p:cNvPr id="1" name=""/>
-        <p:cNvGrpSpPr/>
-        <p:nvPr/>
-      </p:nvGrpSpPr>
-      <p:grpSpPr>
-        <a:xfrm>
-          <a:off x="0" y="0"/>
-          <a:ext cx="0" cy="0"/>
-          <a:chOff x="0" y="0"/>
-          <a:chExt cx="0" cy="0"/>
-        </a:xfrm>
-      </p:grpSpPr>
-      <p:sp>
-        <p:nvSpPr>
           <p:cNvPr id="8194" name="Rectangle 2"/>
           <p:cNvSpPr>
             <a:spLocks noGrp="1" noChangeArrowheads="1"/>
@@ -13069,7 +12229,7 @@
 </p:sld>
 </file>
 
-<file path=ppt/slides/slide13.xml><?xml version="1.0" encoding="utf-8"?>
+<file path=ppt/slides/slide11.xml><?xml version="1.0" encoding="utf-8"?>
 <p:sld xmlns:a="http://schemas.openxmlformats.org/drawingml/2006/main" xmlns:r="http://schemas.openxmlformats.org/officeDocument/2006/relationships" xmlns:p="http://schemas.openxmlformats.org/presentationml/2006/main">
   <p:cSld>
     <p:spTree>
@@ -13191,7 +12351,7 @@
 </p:sld>
 </file>
 
-<file path=ppt/slides/slide14.xml><?xml version="1.0" encoding="utf-8"?>
+<file path=ppt/slides/slide12.xml><?xml version="1.0" encoding="utf-8"?>
 <p:sld xmlns:a="http://schemas.openxmlformats.org/drawingml/2006/main" xmlns:r="http://schemas.openxmlformats.org/officeDocument/2006/relationships" xmlns:p="http://schemas.openxmlformats.org/presentationml/2006/main">
   <p:cSld>
     <p:spTree>
@@ -13251,7 +12411,7 @@
 </p:sld>
 </file>
 
-<file path=ppt/slides/slide15.xml><?xml version="1.0" encoding="utf-8"?>
+<file path=ppt/slides/slide13.xml><?xml version="1.0" encoding="utf-8"?>
 <p:sld xmlns:a="http://schemas.openxmlformats.org/drawingml/2006/main" xmlns:r="http://schemas.openxmlformats.org/officeDocument/2006/relationships" xmlns:p="http://schemas.openxmlformats.org/presentationml/2006/main">
   <p:cSld>
     <p:spTree>
@@ -13328,7 +12488,7 @@
 </p:sld>
 </file>
 
-<file path=ppt/slides/slide16.xml><?xml version="1.0" encoding="utf-8"?>
+<file path=ppt/slides/slide14.xml><?xml version="1.0" encoding="utf-8"?>
 <p:sld xmlns:a="http://schemas.openxmlformats.org/drawingml/2006/main" xmlns:r="http://schemas.openxmlformats.org/officeDocument/2006/relationships" xmlns:p="http://schemas.openxmlformats.org/presentationml/2006/main">
   <p:cSld>
     <p:spTree>
@@ -13443,7 +12603,7 @@
 </p:sld>
 </file>
 
-<file path=ppt/slides/slide17.xml><?xml version="1.0" encoding="utf-8"?>
+<file path=ppt/slides/slide15.xml><?xml version="1.0" encoding="utf-8"?>
 <p:sld xmlns:a="http://schemas.openxmlformats.org/drawingml/2006/main" xmlns:r="http://schemas.openxmlformats.org/officeDocument/2006/relationships" xmlns:p="http://schemas.openxmlformats.org/presentationml/2006/main">
   <p:cSld>
     <p:spTree>
@@ -13518,7 +12678,7 @@
 </p:sld>
 </file>
 
-<file path=ppt/slides/slide18.xml><?xml version="1.0" encoding="utf-8"?>
+<file path=ppt/slides/slide16.xml><?xml version="1.0" encoding="utf-8"?>
 <p:sld xmlns:a="http://schemas.openxmlformats.org/drawingml/2006/main" xmlns:r="http://schemas.openxmlformats.org/officeDocument/2006/relationships" xmlns:p="http://schemas.openxmlformats.org/presentationml/2006/main">
   <p:cSld>
     <p:spTree>
@@ -13642,7 +12802,7 @@
 </p:sld>
 </file>
 
-<file path=ppt/slides/slide19.xml><?xml version="1.0" encoding="utf-8"?>
+<file path=ppt/slides/slide17.xml><?xml version="1.0" encoding="utf-8"?>
 <p:sld xmlns:a="http://schemas.openxmlformats.org/drawingml/2006/main" xmlns:r="http://schemas.openxmlformats.org/officeDocument/2006/relationships" xmlns:p="http://schemas.openxmlformats.org/presentationml/2006/main">
   <p:cSld>
     <p:spTree>
@@ -13788,82 +12948,7 @@
 </p:sld>
 </file>
 
-<file path=ppt/slides/slide2.xml><?xml version="1.0" encoding="utf-8"?>
-<p:sld xmlns:a="http://schemas.openxmlformats.org/drawingml/2006/main" xmlns:r="http://schemas.openxmlformats.org/officeDocument/2006/relationships" xmlns:p="http://schemas.openxmlformats.org/presentationml/2006/main">
-  <p:cSld>
-    <p:spTree>
-      <p:nvGrpSpPr>
-        <p:cNvPr id="1" name=""/>
-        <p:cNvGrpSpPr/>
-        <p:nvPr/>
-      </p:nvGrpSpPr>
-      <p:grpSpPr>
-        <a:xfrm>
-          <a:off x="0" y="0"/>
-          <a:ext cx="0" cy="0"/>
-          <a:chOff x="0" y="0"/>
-          <a:chExt cx="0" cy="0"/>
-        </a:xfrm>
-      </p:grpSpPr>
-      <p:sp>
-        <p:nvSpPr>
-          <p:cNvPr id="4" name="Text Placeholder 3">
-            <a:extLst>
-              <a:ext uri="{FF2B5EF4-FFF2-40B4-BE49-F238E27FC236}">
-                <a16:creationId xmlns:a16="http://schemas.microsoft.com/office/drawing/2014/main" id="{5E600BA7-FA45-884F-9820-9E5F2CB7AA48}"/>
-              </a:ext>
-            </a:extLst>
-          </p:cNvPr>
-          <p:cNvSpPr>
-            <a:spLocks noGrp="1"/>
-          </p:cNvSpPr>
-          <p:nvPr>
-            <p:ph type="body" idx="1"/>
-          </p:nvPr>
-        </p:nvSpPr>
-        <p:spPr>
-          <a:xfrm>
-            <a:off x="415650" y="2724664"/>
-            <a:ext cx="11360700" cy="1408672"/>
-          </a:xfrm>
-        </p:spPr>
-        <p:txBody>
-          <a:bodyPr/>
-          <a:lstStyle/>
-          <a:p>
-            <a:pPr marL="76200" indent="0" algn="ctr">
-              <a:buNone/>
-            </a:pPr>
-            <a:r>
-              <a:rPr lang="en-US" sz="4800" dirty="0"/>
-              <a:t>Please Sit with </a:t>
-            </a:r>
-          </a:p>
-          <a:p>
-            <a:pPr marL="76200" indent="0" algn="ctr">
-              <a:buNone/>
-            </a:pPr>
-            <a:r>
-              <a:rPr lang="en-US" sz="4800" dirty="0"/>
-              <a:t>Your Project Teams</a:t>
-            </a:r>
-          </a:p>
-        </p:txBody>
-      </p:sp>
-    </p:spTree>
-    <p:extLst>
-      <p:ext uri="{BB962C8B-B14F-4D97-AF65-F5344CB8AC3E}">
-        <p14:creationId xmlns:p14="http://schemas.microsoft.com/office/powerpoint/2010/main" val="134665013"/>
-      </p:ext>
-    </p:extLst>
-  </p:cSld>
-  <p:clrMapOvr>
-    <a:masterClrMapping/>
-  </p:clrMapOvr>
-</p:sld>
-</file>
-
-<file path=ppt/slides/slide20.xml><?xml version="1.0" encoding="utf-8"?>
+<file path=ppt/slides/slide18.xml><?xml version="1.0" encoding="utf-8"?>
 <p:sld xmlns:a="http://schemas.openxmlformats.org/drawingml/2006/main" xmlns:r="http://schemas.openxmlformats.org/officeDocument/2006/relationships" xmlns:p="http://schemas.openxmlformats.org/presentationml/2006/main">
   <p:cSld>
     <p:spTree>
@@ -13952,12 +13037,20 @@
               <a:t>Wednesday session tomorrow: </a:t>
             </a:r>
             <a:r>
-              <a:rPr lang="en-US" dirty="0" err="1"/>
+              <a:rPr lang="en-US" dirty="0" err="1">
+                <a:highlight>
+                  <a:srgbClr val="FFFF00"/>
+                </a:highlight>
+              </a:rPr>
               <a:t>Github</a:t>
             </a:r>
             <a:r>
-              <a:rPr lang="en-US" dirty="0"/>
-              <a:t> </a:t>
+              <a:rPr lang="en-US" dirty="0">
+                <a:highlight>
+                  <a:srgbClr val="FFFF00"/>
+                </a:highlight>
+              </a:rPr>
+              <a:t>  (short assignment before the session)</a:t>
             </a:r>
           </a:p>
           <a:p>
@@ -13970,7 +13063,11 @@
               </a:spcBef>
               <a:buNone/>
             </a:pPr>
-            <a:endParaRPr lang="en-US" dirty="0"/>
+            <a:endParaRPr lang="en-US" dirty="0">
+              <a:highlight>
+                <a:srgbClr val="FFFF00"/>
+              </a:highlight>
+            </a:endParaRPr>
           </a:p>
           <a:p>
             <a:pPr>
@@ -14025,6 +13122,81 @@
     <p:extLst>
       <p:ext uri="{BB962C8B-B14F-4D97-AF65-F5344CB8AC3E}">
         <p14:creationId xmlns:p14="http://schemas.microsoft.com/office/powerpoint/2010/main" val="3845565803"/>
+      </p:ext>
+    </p:extLst>
+  </p:cSld>
+  <p:clrMapOvr>
+    <a:masterClrMapping/>
+  </p:clrMapOvr>
+</p:sld>
+</file>
+
+<file path=ppt/slides/slide2.xml><?xml version="1.0" encoding="utf-8"?>
+<p:sld xmlns:a="http://schemas.openxmlformats.org/drawingml/2006/main" xmlns:r="http://schemas.openxmlformats.org/officeDocument/2006/relationships" xmlns:p="http://schemas.openxmlformats.org/presentationml/2006/main">
+  <p:cSld>
+    <p:spTree>
+      <p:nvGrpSpPr>
+        <p:cNvPr id="1" name=""/>
+        <p:cNvGrpSpPr/>
+        <p:nvPr/>
+      </p:nvGrpSpPr>
+      <p:grpSpPr>
+        <a:xfrm>
+          <a:off x="0" y="0"/>
+          <a:ext cx="0" cy="0"/>
+          <a:chOff x="0" y="0"/>
+          <a:chExt cx="0" cy="0"/>
+        </a:xfrm>
+      </p:grpSpPr>
+      <p:sp>
+        <p:nvSpPr>
+          <p:cNvPr id="4" name="Text Placeholder 3">
+            <a:extLst>
+              <a:ext uri="{FF2B5EF4-FFF2-40B4-BE49-F238E27FC236}">
+                <a16:creationId xmlns:a16="http://schemas.microsoft.com/office/drawing/2014/main" id="{5E600BA7-FA45-884F-9820-9E5F2CB7AA48}"/>
+              </a:ext>
+            </a:extLst>
+          </p:cNvPr>
+          <p:cNvSpPr>
+            <a:spLocks noGrp="1"/>
+          </p:cNvSpPr>
+          <p:nvPr>
+            <p:ph type="body" idx="1"/>
+          </p:nvPr>
+        </p:nvSpPr>
+        <p:spPr>
+          <a:xfrm>
+            <a:off x="415650" y="2724664"/>
+            <a:ext cx="11360700" cy="1408672"/>
+          </a:xfrm>
+        </p:spPr>
+        <p:txBody>
+          <a:bodyPr/>
+          <a:lstStyle/>
+          <a:p>
+            <a:pPr marL="76200" indent="0" algn="ctr">
+              <a:buNone/>
+            </a:pPr>
+            <a:r>
+              <a:rPr lang="en-US" sz="4800" dirty="0"/>
+              <a:t>Please Sit with </a:t>
+            </a:r>
+          </a:p>
+          <a:p>
+            <a:pPr marL="76200" indent="0" algn="ctr">
+              <a:buNone/>
+            </a:pPr>
+            <a:r>
+              <a:rPr lang="en-US" sz="4800" dirty="0"/>
+              <a:t>Your Project Teams</a:t>
+            </a:r>
+          </a:p>
+        </p:txBody>
+      </p:sp>
+    </p:spTree>
+    <p:extLst>
+      <p:ext uri="{BB962C8B-B14F-4D97-AF65-F5344CB8AC3E}">
+        <p14:creationId xmlns:p14="http://schemas.microsoft.com/office/powerpoint/2010/main" val="134665013"/>
       </p:ext>
     </p:extLst>
   </p:cSld>
@@ -14129,6 +13301,13 @@
             <a:r>
               <a:rPr lang="en-US" dirty="0"/>
               <a:t> </a:t>
+            </a:r>
+          </a:p>
+          <a:p>
+            <a:pPr lvl="1"/>
+            <a:r>
+              <a:rPr lang="en-US" dirty="0"/>
+              <a:t>Short Pre-session assignment on canvas</a:t>
             </a:r>
           </a:p>
           <a:p>

--- a/Lectures/06-data-exploration.pptx
+++ b/Lectures/06-data-exploration.pptx
@@ -12773,7 +12773,7 @@
             </a:pPr>
             <a:r>
               <a:rPr lang="en-US" sz="2800" dirty="0"/>
-              <a:t>Schedule times to work on the project proposal over the next week and a half</a:t>
+              <a:t>Schedule times to work on the project proposal over the next week </a:t>
             </a:r>
           </a:p>
           <a:p>
